--- a/docs/presentation.pptx
+++ b/docs/presentation.pptx
@@ -2,29 +2,29 @@
 <file path=ppt/presentation.xml><?xml version="1.0" encoding="utf-8"?>
 <p:presentation xmlns:p="http://schemas.openxmlformats.org/presentationml/2006/main">
   <p:sldMasterIdLst>
-    <p:sldMasterId xmlns:r="http://schemas.openxmlformats.org/officeDocument/2006/relationships" id="2147483648" r:id="R24343e9a48914882"/>
+    <p:sldMasterId xmlns:r="http://schemas.openxmlformats.org/officeDocument/2006/relationships" id="2147483648" r:id="R0377a003533643f1"/>
   </p:sldMasterIdLst>
   <p:notesMasterIdLst>
-    <p:notesMasterId xmlns:r="http://schemas.openxmlformats.org/officeDocument/2006/relationships" r:id="R5cc81fd7c83b48e3"/>
+    <p:notesMasterId xmlns:r="http://schemas.openxmlformats.org/officeDocument/2006/relationships" r:id="R9db89f01ce9248c2"/>
   </p:notesMasterIdLst>
   <p:sldIdLst>
-    <p:sldId xmlns:r="http://schemas.openxmlformats.org/officeDocument/2006/relationships" id="256" r:id="Rf0d898f4f4844d7f"/>
-    <p:sldId xmlns:r="http://schemas.openxmlformats.org/officeDocument/2006/relationships" id="257" r:id="R05c941889b224390"/>
-    <p:sldId xmlns:r="http://schemas.openxmlformats.org/officeDocument/2006/relationships" id="258" r:id="Rd301c00b40934e1c"/>
-    <p:sldId xmlns:r="http://schemas.openxmlformats.org/officeDocument/2006/relationships" id="259" r:id="R204c6a75f79041c8"/>
-    <p:sldId xmlns:r="http://schemas.openxmlformats.org/officeDocument/2006/relationships" id="260" r:id="R74a54231c8bf4574"/>
-    <p:sldId xmlns:r="http://schemas.openxmlformats.org/officeDocument/2006/relationships" id="261" r:id="Rc55329ecc5b341d5"/>
-    <p:sldId xmlns:r="http://schemas.openxmlformats.org/officeDocument/2006/relationships" id="262" r:id="Rb7c1985b444c4f97"/>
-    <p:sldId xmlns:r="http://schemas.openxmlformats.org/officeDocument/2006/relationships" id="263" r:id="R41662fc93fda420d"/>
-    <p:sldId xmlns:r="http://schemas.openxmlformats.org/officeDocument/2006/relationships" id="264" r:id="R1118d319f64c4f4b"/>
-    <p:sldId xmlns:r="http://schemas.openxmlformats.org/officeDocument/2006/relationships" id="265" r:id="R43742800c95a4cf1"/>
-    <p:sldId xmlns:r="http://schemas.openxmlformats.org/officeDocument/2006/relationships" id="266" r:id="R9fe24f95e2314753"/>
-    <p:sldId xmlns:r="http://schemas.openxmlformats.org/officeDocument/2006/relationships" id="267" r:id="R9ef7901f34dd4435"/>
-    <p:sldId xmlns:r="http://schemas.openxmlformats.org/officeDocument/2006/relationships" id="268" r:id="Rfaa95e94ead6429d"/>
-    <p:sldId xmlns:r="http://schemas.openxmlformats.org/officeDocument/2006/relationships" id="269" r:id="R3b0c3d44f7174d04"/>
-    <p:sldId xmlns:r="http://schemas.openxmlformats.org/officeDocument/2006/relationships" id="270" r:id="R7ca941e8a5b044f3"/>
-    <p:sldId xmlns:r="http://schemas.openxmlformats.org/officeDocument/2006/relationships" id="271" r:id="R3ef64cee79e841ee"/>
-    <p:sldId xmlns:r="http://schemas.openxmlformats.org/officeDocument/2006/relationships" id="272" r:id="R60b354b108834052"/>
+    <p:sldId xmlns:r="http://schemas.openxmlformats.org/officeDocument/2006/relationships" id="256" r:id="R65ecbe0f70b54454"/>
+    <p:sldId xmlns:r="http://schemas.openxmlformats.org/officeDocument/2006/relationships" id="257" r:id="R84be218b853949bd"/>
+    <p:sldId xmlns:r="http://schemas.openxmlformats.org/officeDocument/2006/relationships" id="258" r:id="Rd4d60b2b90a7469f"/>
+    <p:sldId xmlns:r="http://schemas.openxmlformats.org/officeDocument/2006/relationships" id="259" r:id="R83bc30503ca74843"/>
+    <p:sldId xmlns:r="http://schemas.openxmlformats.org/officeDocument/2006/relationships" id="260" r:id="Rb28daa500c774809"/>
+    <p:sldId xmlns:r="http://schemas.openxmlformats.org/officeDocument/2006/relationships" id="261" r:id="R4f26198893004def"/>
+    <p:sldId xmlns:r="http://schemas.openxmlformats.org/officeDocument/2006/relationships" id="262" r:id="R3e315437bc3543ae"/>
+    <p:sldId xmlns:r="http://schemas.openxmlformats.org/officeDocument/2006/relationships" id="263" r:id="R478bbd9b3bd84e15"/>
+    <p:sldId xmlns:r="http://schemas.openxmlformats.org/officeDocument/2006/relationships" id="264" r:id="Re11bb638420e4291"/>
+    <p:sldId xmlns:r="http://schemas.openxmlformats.org/officeDocument/2006/relationships" id="265" r:id="R746f74b596ce476a"/>
+    <p:sldId xmlns:r="http://schemas.openxmlformats.org/officeDocument/2006/relationships" id="266" r:id="Rc022ae62468047cf"/>
+    <p:sldId xmlns:r="http://schemas.openxmlformats.org/officeDocument/2006/relationships" id="267" r:id="R1807321324ad4aa5"/>
+    <p:sldId xmlns:r="http://schemas.openxmlformats.org/officeDocument/2006/relationships" id="268" r:id="R8fd03ec3d4dc40ea"/>
+    <p:sldId xmlns:r="http://schemas.openxmlformats.org/officeDocument/2006/relationships" id="269" r:id="Rc48c736db4b54372"/>
+    <p:sldId xmlns:r="http://schemas.openxmlformats.org/officeDocument/2006/relationships" id="270" r:id="R5fd39900a3834589"/>
+    <p:sldId xmlns:r="http://schemas.openxmlformats.org/officeDocument/2006/relationships" id="271" r:id="Rbe0232892c9e4bf0"/>
+    <p:sldId xmlns:r="http://schemas.openxmlformats.org/officeDocument/2006/relationships" id="272" r:id="Rb03a46c630fb4d6c"/>
   </p:sldIdLst>
   <p:sldSz cx="12192000" cy="6858000"/>
   <p:notesSz cx="6858000" cy="9144000"/>
@@ -858,7 +858,7 @@
           <a:lstStyle xmlns:a="http://schemas.openxmlformats.org/drawingml/2006/main"/>
           <a:p xmlns:a="http://schemas.openxmlformats.org/drawingml/2006/main">
             <a:r>
-              <a:t>Источники и область: Локальная production-сборка, принятые 35 файлов данных; UI screenshot.</a:t>
+              <a:t>Источники и область: Отчёт §10, S16: пример Екатеринбурга (ID 1971), пять кандидатов после заранее заданных фильтров. Городской округ, население от половины до удвоенного, Total ±10%, вне Москвы и Санкт-Петербурга. Первые два контекстных аналога относятся к другой NCut10-группе. Изображение: локальная production-сборка, принятые 35 файлов данных; UI screenshot.</a:t>
             </a:r>
           </a:p>
           <a:p xmlns:a="http://schemas.openxmlformats.org/drawingml/2006/main">
@@ -1258,7 +1258,7 @@
           <a:lstStyle xmlns:a="http://schemas.openxmlformats.org/drawingml/2006/main"/>
           <a:p xmlns:a="http://schemas.openxmlformats.org/drawingml/2006/main">
             <a:r>
-              <a:t>Источники и область: S02 METHODS.md; научные формулы и нормировка в замороженном коде.</a:t>
+              <a:t>Источники и область: S02 METHODS.md; L = ln Total, h = ln(GM(c)/Total), R = H·CLR/√5. Рабочее пространство X6: L, h и четыре R. Для S_Dbw — эквивалентное по расстояниям Y7. Научные формулы и нормировка в замороженном коде.</a:t>
             </a:r>
           </a:p>
           <a:p xmlns:a="http://schemas.openxmlformats.org/drawingml/2006/main">
@@ -1795,7 +1795,7 @@
           <p:cNvPr id="3" name="Title">
             <a:extLst xmlns:a="http://schemas.openxmlformats.org/drawingml/2006/main">
               <a:ext uri="{FF2B5EF4-FFF2-40B4-BE49-F238E27FC236}">
-                <a16:creationId xmlns:a16="http://schemas.microsoft.com/office/drawing/2014/main" id="{87EA1100-9088-4E42-A996-102BE1DFC81F}"/>
+                <a16:creationId xmlns:a16="http://schemas.microsoft.com/office/drawing/2014/main" id="{F083429B-05F3-4599-B781-A73A9418BA57}"/>
               </a:ext>
             </a:extLst>
           </p:cNvPr>
@@ -1952,7 +1952,7 @@
           <p:cNvPr id="2" name="Subtitle">
             <a:extLst xmlns:a="http://schemas.openxmlformats.org/drawingml/2006/main">
               <a:ext uri="{FF2B5EF4-FFF2-40B4-BE49-F238E27FC236}">
-                <a16:creationId xmlns:a16="http://schemas.microsoft.com/office/drawing/2014/main" id="{8546CD57-BD07-4396-B14E-57C2EBCA456B}"/>
+                <a16:creationId xmlns:a16="http://schemas.microsoft.com/office/drawing/2014/main" id="{7DC092DF-E1E4-49A1-A2A9-F5C5862E5FF6}"/>
               </a:ext>
             </a:extLst>
           </p:cNvPr>
@@ -2126,7 +2126,7 @@
           <p:cNvPr id="2" name="Section title">
             <a:extLst xmlns:a="http://schemas.openxmlformats.org/drawingml/2006/main">
               <a:ext uri="{FF2B5EF4-FFF2-40B4-BE49-F238E27FC236}">
-                <a16:creationId xmlns:a16="http://schemas.microsoft.com/office/drawing/2014/main" id="{8DFAC971-DE34-4348-8C1F-A89AD64A8497}"/>
+                <a16:creationId xmlns:a16="http://schemas.microsoft.com/office/drawing/2014/main" id="{70D4CB0F-74AC-4375-950E-DCC913236D2C}"/>
               </a:ext>
             </a:extLst>
           </p:cNvPr>
@@ -2300,7 +2300,7 @@
           <p:cNvPr id="3" name="Title">
             <a:extLst xmlns:a="http://schemas.openxmlformats.org/drawingml/2006/main">
               <a:ext uri="{FF2B5EF4-FFF2-40B4-BE49-F238E27FC236}">
-                <a16:creationId xmlns:a16="http://schemas.microsoft.com/office/drawing/2014/main" id="{E0D3E6BB-207C-496C-888E-375DA1658C9E}"/>
+                <a16:creationId xmlns:a16="http://schemas.microsoft.com/office/drawing/2014/main" id="{57A647C2-7BEC-4322-9D5A-5C994B287934}"/>
               </a:ext>
             </a:extLst>
           </p:cNvPr>
@@ -2457,7 +2457,7 @@
           <p:cNvPr id="2" name="Body">
             <a:extLst xmlns:a="http://schemas.openxmlformats.org/drawingml/2006/main">
               <a:ext uri="{FF2B5EF4-FFF2-40B4-BE49-F238E27FC236}">
-                <a16:creationId xmlns:a16="http://schemas.microsoft.com/office/drawing/2014/main" id="{C95C64DF-DE17-41DB-8220-ADDCF1B3C123}"/>
+                <a16:creationId xmlns:a16="http://schemas.microsoft.com/office/drawing/2014/main" id="{ACE7DA65-9D65-4113-B859-330A48CAEB03}"/>
               </a:ext>
             </a:extLst>
           </p:cNvPr>
@@ -2631,7 +2631,7 @@
           <p:cNvPr id="4" name="Title">
             <a:extLst xmlns:a="http://schemas.openxmlformats.org/drawingml/2006/main">
               <a:ext uri="{FF2B5EF4-FFF2-40B4-BE49-F238E27FC236}">
-                <a16:creationId xmlns:a16="http://schemas.microsoft.com/office/drawing/2014/main" id="{FF092A40-5053-4C85-8A10-ECBE9AB61444}"/>
+                <a16:creationId xmlns:a16="http://schemas.microsoft.com/office/drawing/2014/main" id="{3EB41FA0-47C6-4609-AB57-709265393208}"/>
               </a:ext>
             </a:extLst>
           </p:cNvPr>
@@ -2788,7 +2788,7 @@
           <p:cNvPr id="2" name="Left column">
             <a:extLst xmlns:a="http://schemas.openxmlformats.org/drawingml/2006/main">
               <a:ext uri="{FF2B5EF4-FFF2-40B4-BE49-F238E27FC236}">
-                <a16:creationId xmlns:a16="http://schemas.microsoft.com/office/drawing/2014/main" id="{5C96884D-E628-443B-B0D4-8A1520919B9A}"/>
+                <a16:creationId xmlns:a16="http://schemas.microsoft.com/office/drawing/2014/main" id="{5EBDBC04-F812-43B6-BD85-E1457D111F94}"/>
               </a:ext>
             </a:extLst>
           </p:cNvPr>
@@ -2945,7 +2945,7 @@
           <p:cNvPr id="3" name="Right column">
             <a:extLst xmlns:a="http://schemas.openxmlformats.org/drawingml/2006/main">
               <a:ext uri="{FF2B5EF4-FFF2-40B4-BE49-F238E27FC236}">
-                <a16:creationId xmlns:a16="http://schemas.microsoft.com/office/drawing/2014/main" id="{EF30FC0A-F874-43F9-9AB4-DB619F373032}"/>
+                <a16:creationId xmlns:a16="http://schemas.microsoft.com/office/drawing/2014/main" id="{02FA1343-7AC9-4D2D-8E8C-97881206D5EC}"/>
               </a:ext>
             </a:extLst>
           </p:cNvPr>
@@ -3119,7 +3119,7 @@
           <p:cNvPr id="3" name="Title">
             <a:extLst xmlns:a="http://schemas.openxmlformats.org/drawingml/2006/main">
               <a:ext uri="{FF2B5EF4-FFF2-40B4-BE49-F238E27FC236}">
-                <a16:creationId xmlns:a16="http://schemas.microsoft.com/office/drawing/2014/main" id="{7F0D83A0-3E99-4951-B1CC-4FD3F7E550CD}"/>
+                <a16:creationId xmlns:a16="http://schemas.microsoft.com/office/drawing/2014/main" id="{F1A59084-BBE2-4133-8658-4BA57094AF6F}"/>
               </a:ext>
             </a:extLst>
           </p:cNvPr>
@@ -3276,7 +3276,7 @@
           <p:cNvPr id="2" name="Left column">
             <a:extLst xmlns:a="http://schemas.openxmlformats.org/drawingml/2006/main">
               <a:ext uri="{FF2B5EF4-FFF2-40B4-BE49-F238E27FC236}">
-                <a16:creationId xmlns:a16="http://schemas.microsoft.com/office/drawing/2014/main" id="{95668451-A6A3-4565-9495-F808DF3712E0}"/>
+                <a16:creationId xmlns:a16="http://schemas.microsoft.com/office/drawing/2014/main" id="{D975C75E-4FA0-4873-82B4-8DBB221E7750}"/>
               </a:ext>
             </a:extLst>
           </p:cNvPr>
@@ -3471,12 +3471,12 @@
   </p:cSld>
   <p:clrMap bg1="lt1" tx1="dk1" bg2="lt2" tx2="dk2" accent1="accent1" accent2="accent2" accent3="accent3" accent4="accent4" accent5="accent5" accent6="accent6" hlink="hlink" folHlink="folHlink"/>
   <p:sldLayoutIdLst>
-    <p:sldLayoutId xmlns:r="http://schemas.openxmlformats.org/officeDocument/2006/relationships" id="2147483649" r:id="R516faf8785fe4b6a"/>
-    <p:sldLayoutId xmlns:r="http://schemas.openxmlformats.org/officeDocument/2006/relationships" id="2147483650" r:id="Ra3408e2fd89c4909"/>
-    <p:sldLayoutId xmlns:r="http://schemas.openxmlformats.org/officeDocument/2006/relationships" id="2147483651" r:id="R23ac8ac70fb14976"/>
-    <p:sldLayoutId xmlns:r="http://schemas.openxmlformats.org/officeDocument/2006/relationships" id="2147483652" r:id="R3314a7f80ee04a5f"/>
-    <p:sldLayoutId xmlns:r="http://schemas.openxmlformats.org/officeDocument/2006/relationships" id="2147483653" r:id="Ra3fa43ebd1654f34"/>
-    <p:sldLayoutId xmlns:r="http://schemas.openxmlformats.org/officeDocument/2006/relationships" id="2147483654" r:id="R82f2860308cf49d2"/>
+    <p:sldLayoutId xmlns:r="http://schemas.openxmlformats.org/officeDocument/2006/relationships" id="2147483649" r:id="R42d92b4f339e4b91"/>
+    <p:sldLayoutId xmlns:r="http://schemas.openxmlformats.org/officeDocument/2006/relationships" id="2147483650" r:id="Rf47eb90e01ff4c92"/>
+    <p:sldLayoutId xmlns:r="http://schemas.openxmlformats.org/officeDocument/2006/relationships" id="2147483651" r:id="Ra84f5011e43c4c17"/>
+    <p:sldLayoutId xmlns:r="http://schemas.openxmlformats.org/officeDocument/2006/relationships" id="2147483652" r:id="R63f16ba2b76a46df"/>
+    <p:sldLayoutId xmlns:r="http://schemas.openxmlformats.org/officeDocument/2006/relationships" id="2147483653" r:id="Rbc50ef8555254bc9"/>
+    <p:sldLayoutId xmlns:r="http://schemas.openxmlformats.org/officeDocument/2006/relationships" id="2147483654" r:id="R2720a55ed9c64e8f"/>
   </p:sldLayoutIdLst>
   <p:txStyles>
     <p:titleStyle>
@@ -4559,7 +4559,7 @@
           <c:idx val="0"/>
           <c:order val="0"/>
           <c:tx>
-            <c:v>MAE log</c:v>
+            <c:v>MAE логарифма</c:v>
           </c:tx>
           <c:spPr>
             <a:solidFill xmlns:a="http://schemas.openxmlformats.org/drawingml/2006/main">
@@ -4766,7 +4766,7 @@
           <p:cNvPr id="9" name="">
             <a:extLst xmlns:a="http://schemas.openxmlformats.org/drawingml/2006/main">
               <a:ext uri="{FF2B5EF4-FFF2-40B4-BE49-F238E27FC236}">
-                <a16:creationId xmlns:a16="http://schemas.microsoft.com/office/drawing/2014/main" id="{1951718B-E50C-4541-8D11-FD8948BB0618}"/>
+                <a16:creationId xmlns:a16="http://schemas.microsoft.com/office/drawing/2014/main" id="{13F841F3-C45F-425A-A7E5-3A5D1C4700E6}"/>
               </a:ext>
             </a:extLst>
           </p:cNvPr>
@@ -4832,7 +4832,7 @@
           <p:cNvPr id="2" name="">
             <a:extLst xmlns:a="http://schemas.openxmlformats.org/drawingml/2006/main">
               <a:ext uri="{FF2B5EF4-FFF2-40B4-BE49-F238E27FC236}">
-                <a16:creationId xmlns:a16="http://schemas.microsoft.com/office/drawing/2014/main" id="{F69136FA-21A9-4D7F-AEB6-85934646511E}"/>
+                <a16:creationId xmlns:a16="http://schemas.microsoft.com/office/drawing/2014/main" id="{197ED1A0-4893-4604-B58D-091A3F732A9E}"/>
               </a:ext>
             </a:extLst>
           </p:cNvPr>
@@ -4888,7 +4888,7 @@
                 <a:ea typeface="Arial"/>
                 <a:cs typeface="Arial"/>
               </a:rPr>
-              <a:t>Экономически близкие территории</a:t>
+              <a:t>Близость территорий</a:t>
             </a:r>
           </a:p>
           <a:p xmlns:a="http://schemas.openxmlformats.org/drawingml/2006/main">
@@ -4911,7 +4911,7 @@
                 <a:ea typeface="Arial"/>
                 <a:cs typeface="Arial"/>
               </a:rPr>
-              <a:t>через структуру расходов</a:t>
+              <a:t>по уровню и составу расходов</a:t>
             </a:r>
           </a:p>
         </p:txBody>
@@ -4921,7 +4921,7 @@
           <p:cNvPr id="3" name="">
             <a:extLst xmlns:a="http://schemas.openxmlformats.org/drawingml/2006/main">
               <a:ext uri="{FF2B5EF4-FFF2-40B4-BE49-F238E27FC236}">
-                <a16:creationId xmlns:a16="http://schemas.microsoft.com/office/drawing/2014/main" id="{1FDBBAA2-D787-4C52-BF03-70304CFB02EE}"/>
+                <a16:creationId xmlns:a16="http://schemas.microsoft.com/office/drawing/2014/main" id="{F81F4738-7BFD-4EBD-ABC7-B5140EBC096F}"/>
               </a:ext>
             </a:extLst>
           </p:cNvPr>
@@ -4987,7 +4987,7 @@
           <p:cNvPr id="4" name="">
             <a:extLst xmlns:a="http://schemas.openxmlformats.org/drawingml/2006/main">
               <a:ext uri="{FF2B5EF4-FFF2-40B4-BE49-F238E27FC236}">
-                <a16:creationId xmlns:a16="http://schemas.microsoft.com/office/drawing/2014/main" id="{B687FBCF-AA44-41D3-A4F6-8D95A6269E22}"/>
+                <a16:creationId xmlns:a16="http://schemas.microsoft.com/office/drawing/2014/main" id="{BDCD8E07-CB95-4992-9C54-C788FC9DE274}"/>
               </a:ext>
             </a:extLst>
           </p:cNvPr>
@@ -5053,7 +5053,7 @@
           <p:cNvPr id="5" name="">
             <a:extLst xmlns:a="http://schemas.openxmlformats.org/drawingml/2006/main">
               <a:ext uri="{FF2B5EF4-FFF2-40B4-BE49-F238E27FC236}">
-                <a16:creationId xmlns:a16="http://schemas.microsoft.com/office/drawing/2014/main" id="{6703BA10-AA49-4421-988F-34D85F86B5CB}"/>
+                <a16:creationId xmlns:a16="http://schemas.microsoft.com/office/drawing/2014/main" id="{4FFFD638-4349-4745-9EDC-47B1DDE4C968}"/>
               </a:ext>
             </a:extLst>
           </p:cNvPr>
@@ -5119,7 +5119,7 @@
           <p:cNvPr id="6" name="">
             <a:extLst xmlns:a="http://schemas.openxmlformats.org/drawingml/2006/main">
               <a:ext uri="{FF2B5EF4-FFF2-40B4-BE49-F238E27FC236}">
-                <a16:creationId xmlns:a16="http://schemas.microsoft.com/office/drawing/2014/main" id="{2A870E9D-257B-46BD-AD8C-E5E9B0438F08}"/>
+                <a16:creationId xmlns:a16="http://schemas.microsoft.com/office/drawing/2014/main" id="{391DE7A1-D025-4C32-8859-41E3783C4EEE}"/>
               </a:ext>
             </a:extLst>
           </p:cNvPr>
@@ -5185,7 +5185,7 @@
           <p:cNvPr id="7" name="">
             <a:extLst xmlns:a="http://schemas.openxmlformats.org/drawingml/2006/main">
               <a:ext uri="{FF2B5EF4-FFF2-40B4-BE49-F238E27FC236}">
-                <a16:creationId xmlns:a16="http://schemas.microsoft.com/office/drawing/2014/main" id="{53A9BE4E-E2F0-49F4-AA21-794BBE3933A4}"/>
+                <a16:creationId xmlns:a16="http://schemas.microsoft.com/office/drawing/2014/main" id="{159A094E-DB97-4E5B-B480-B5EA24BC08E0}"/>
               </a:ext>
             </a:extLst>
           </p:cNvPr>
@@ -5251,7 +5251,7 @@
           <p:cNvPr id="8" name="">
             <a:extLst xmlns:a="http://schemas.openxmlformats.org/drawingml/2006/main">
               <a:ext uri="{FF2B5EF4-FFF2-40B4-BE49-F238E27FC236}">
-                <a16:creationId xmlns:a16="http://schemas.microsoft.com/office/drawing/2014/main" id="{8E779604-2043-4874-AB4C-4D69CF56EA99}"/>
+                <a16:creationId xmlns:a16="http://schemas.microsoft.com/office/drawing/2014/main" id="{C6AB2024-328E-4D24-B48C-C2D1E4CFAA6E}"/>
               </a:ext>
             </a:extLst>
           </p:cNvPr>
@@ -5315,7 +5315,7 @@
     </p:spTree>
     <p:extLst>
       <p:ext uri="{BB962C8B-B14F-4D97-AF65-F5344CB8AC3E}">
-        <p14:creationId xmlns:p14="http://schemas.microsoft.com/office/powerpoint/2010/main" val="1208462029"/>
+        <p14:creationId xmlns:p14="http://schemas.microsoft.com/office/powerpoint/2010/main" val="201806525"/>
       </p:ext>
     </p:extLst>
   </p:cSld>
@@ -5346,7 +5346,7 @@
           <p:cNvPr id="8" name="">
             <a:extLst xmlns:a="http://schemas.openxmlformats.org/drawingml/2006/main">
               <a:ext uri="{FF2B5EF4-FFF2-40B4-BE49-F238E27FC236}">
-                <a16:creationId xmlns:a16="http://schemas.microsoft.com/office/drawing/2014/main" id="{843040A8-9881-40A7-B250-1ED17614A4BD}"/>
+                <a16:creationId xmlns:a16="http://schemas.microsoft.com/office/drawing/2014/main" id="{6F684201-887F-4084-B086-5EF8BBD43710}"/>
               </a:ext>
             </a:extLst>
           </p:cNvPr>
@@ -5412,7 +5412,7 @@
           <p:cNvPr id="2" name="">
             <a:extLst xmlns:a="http://schemas.openxmlformats.org/drawingml/2006/main">
               <a:ext uri="{FF2B5EF4-FFF2-40B4-BE49-F238E27FC236}">
-                <a16:creationId xmlns:a16="http://schemas.microsoft.com/office/drawing/2014/main" id="{7947EB8D-A99F-4E03-BB9C-E462F9ECD1AC}"/>
+                <a16:creationId xmlns:a16="http://schemas.microsoft.com/office/drawing/2014/main" id="{84722A24-FBE1-4D1A-A15C-E8F36BA7BC90}"/>
               </a:ext>
             </a:extLst>
           </p:cNvPr>
@@ -5478,7 +5478,7 @@
           <p:cNvPr id="3" name="">
             <a:extLst xmlns:a="http://schemas.openxmlformats.org/drawingml/2006/main">
               <a:ext uri="{FF2B5EF4-FFF2-40B4-BE49-F238E27FC236}">
-                <a16:creationId xmlns:a16="http://schemas.microsoft.com/office/drawing/2014/main" id="{7E325A0B-6A97-45F7-A18B-6642764A63A3}"/>
+                <a16:creationId xmlns:a16="http://schemas.microsoft.com/office/drawing/2014/main" id="{B7A2D5CF-C8B2-40EF-ACCF-6AC95212DB82}"/>
               </a:ext>
             </a:extLst>
           </p:cNvPr>
@@ -5544,7 +5544,7 @@
           <p:cNvPr id="4" name="">
             <a:extLst xmlns:a="http://schemas.openxmlformats.org/drawingml/2006/main">
               <a:ext uri="{FF2B5EF4-FFF2-40B4-BE49-F238E27FC236}">
-                <a16:creationId xmlns:a16="http://schemas.microsoft.com/office/drawing/2014/main" id="{DB12A5D5-BC98-4F7D-B231-A2B26AD29223}"/>
+                <a16:creationId xmlns:a16="http://schemas.microsoft.com/office/drawing/2014/main" id="{622B1A8F-7E62-470E-B0BE-115CF843B889}"/>
               </a:ext>
             </a:extLst>
           </p:cNvPr>
@@ -5610,7 +5610,7 @@
           <p:cNvPr id="5" name="">
             <a:extLst xmlns:a="http://schemas.openxmlformats.org/drawingml/2006/main">
               <a:ext uri="{FF2B5EF4-FFF2-40B4-BE49-F238E27FC236}">
-                <a16:creationId xmlns:a16="http://schemas.microsoft.com/office/drawing/2014/main" id="{9C057FF2-6D75-4805-BDE2-272213EB5368}"/>
+                <a16:creationId xmlns:a16="http://schemas.microsoft.com/office/drawing/2014/main" id="{F40D23CF-1CE1-404C-B443-454D7902AA16}"/>
               </a:ext>
             </a:extLst>
           </p:cNvPr>
@@ -5676,7 +5676,7 @@
           <p:cNvPr id="6" name="">
             <a:extLst xmlns:a="http://schemas.openxmlformats.org/drawingml/2006/main">
               <a:ext uri="{FF2B5EF4-FFF2-40B4-BE49-F238E27FC236}">
-                <a16:creationId xmlns:a16="http://schemas.microsoft.com/office/drawing/2014/main" id="{4F5DCB12-E3B8-4299-AEF6-468755B99D78}"/>
+                <a16:creationId xmlns:a16="http://schemas.microsoft.com/office/drawing/2014/main" id="{BB6E654C-E75C-4755-8F28-7E2E4AB0FE21}"/>
               </a:ext>
             </a:extLst>
           </p:cNvPr>
@@ -5784,7 +5784,7 @@
                           <a:ea typeface="Arial"/>
                           <a:cs typeface="Arial"/>
                         </a:rPr>
-                        <a:t>Все 291 ID попали в одну группу SSE6 из 333 ID</a:t>
+                        <a:t>Участники этих групп (291 ID) вошли в одну группу SSE6 из 333 ID</a:t>
                       </a:r>
                     </a:p>
                   </a:txBody>
@@ -5954,7 +5954,7 @@
           <p:cNvPr id="7" name="">
             <a:extLst xmlns:a="http://schemas.openxmlformats.org/drawingml/2006/main">
               <a:ext uri="{FF2B5EF4-FFF2-40B4-BE49-F238E27FC236}">
-                <a16:creationId xmlns:a16="http://schemas.microsoft.com/office/drawing/2014/main" id="{61BCFE09-511E-4AD9-A575-5628BA00F595}"/>
+                <a16:creationId xmlns:a16="http://schemas.microsoft.com/office/drawing/2014/main" id="{CAF36A16-4409-42B6-AD7D-26DE7B5C7D97}"/>
               </a:ext>
             </a:extLst>
           </p:cNvPr>
@@ -5965,8 +5965,8 @@
         </p:nvSpPr>
         <p:spPr>
           <a:xfrm xmlns:a="http://schemas.openxmlformats.org/drawingml/2006/main">
-            <a:off x="495300" y="5905500"/>
-            <a:ext cx="11049000" cy="342900"/>
+            <a:off x="495300" y="6000750"/>
+            <a:ext cx="11049000" cy="285750"/>
           </a:xfrm>
           <a:prstGeom xmlns:a="http://schemas.openxmlformats.org/drawingml/2006/main" prst="rect">
             <a:avLst/>
@@ -6018,7 +6018,7 @@
     </p:spTree>
     <p:extLst>
       <p:ext uri="{BB962C8B-B14F-4D97-AF65-F5344CB8AC3E}">
-        <p14:creationId xmlns:p14="http://schemas.microsoft.com/office/powerpoint/2010/main" val="1508467373"/>
+        <p14:creationId xmlns:p14="http://schemas.microsoft.com/office/powerpoint/2010/main" val="1559880892"/>
       </p:ext>
     </p:extLst>
   </p:cSld>
@@ -6049,7 +6049,7 @@
           <p:cNvPr id="8" name="">
             <a:extLst xmlns:a="http://schemas.openxmlformats.org/drawingml/2006/main">
               <a:ext uri="{FF2B5EF4-FFF2-40B4-BE49-F238E27FC236}">
-                <a16:creationId xmlns:a16="http://schemas.microsoft.com/office/drawing/2014/main" id="{71DCD050-8B4F-4AF1-9382-4F4A9DD227BC}"/>
+                <a16:creationId xmlns:a16="http://schemas.microsoft.com/office/drawing/2014/main" id="{AC37933B-26D0-4480-9899-164950530559}"/>
               </a:ext>
             </a:extLst>
           </p:cNvPr>
@@ -6115,7 +6115,7 @@
           <p:cNvPr id="2" name="">
             <a:extLst xmlns:a="http://schemas.openxmlformats.org/drawingml/2006/main">
               <a:ext uri="{FF2B5EF4-FFF2-40B4-BE49-F238E27FC236}">
-                <a16:creationId xmlns:a16="http://schemas.microsoft.com/office/drawing/2014/main" id="{0F9C597A-F3A7-48C0-BE86-382BFC2800F1}"/>
+                <a16:creationId xmlns:a16="http://schemas.microsoft.com/office/drawing/2014/main" id="{356F1B2B-7092-458E-B9CC-43E45F49818C}"/>
               </a:ext>
             </a:extLst>
           </p:cNvPr>
@@ -6181,7 +6181,7 @@
           <p:cNvPr id="3" name="">
             <a:extLst xmlns:a="http://schemas.openxmlformats.org/drawingml/2006/main">
               <a:ext uri="{FF2B5EF4-FFF2-40B4-BE49-F238E27FC236}">
-                <a16:creationId xmlns:a16="http://schemas.microsoft.com/office/drawing/2014/main" id="{55B70262-F1C1-4D95-9FD7-ACCFB90148B8}"/>
+                <a16:creationId xmlns:a16="http://schemas.microsoft.com/office/drawing/2014/main" id="{A7D496A1-266E-4B63-8237-865408A51BE0}"/>
               </a:ext>
             </a:extLst>
           </p:cNvPr>
@@ -6237,7 +6237,7 @@
                 <a:ea typeface="Arial"/>
                 <a:cs typeface="Arial"/>
               </a:rPr>
-              <a:t>Соседние месяцы сопоставлены по общим ID: максимальная сумма пересечений. Всего 69 сопоставлений для трёх представлений.</a:t>
+              <a:t>2016 МО с полной историей; 174 неполные истории не включены. 69 сопоставлений соседних месяцев по общим ID с максимальной суммой пересечений.</a:t>
             </a:r>
           </a:p>
         </p:txBody>
@@ -6247,7 +6247,7 @@
           <p:cNvPr id="4" name="">
             <a:extLst xmlns:a="http://schemas.openxmlformats.org/drawingml/2006/main">
               <a:ext uri="{FF2B5EF4-FFF2-40B4-BE49-F238E27FC236}">
-                <a16:creationId xmlns:a16="http://schemas.microsoft.com/office/drawing/2014/main" id="{58A774D3-A94B-4B80-BFB7-7ABB0F4F47F1}"/>
+                <a16:creationId xmlns:a16="http://schemas.microsoft.com/office/drawing/2014/main" id="{342204BE-5612-4AB6-BEAF-085A1854AC9A}"/>
               </a:ext>
             </a:extLst>
           </p:cNvPr>
@@ -6313,7 +6313,7 @@
           <p:cNvPr id="5" name="">
             <a:extLst xmlns:a="http://schemas.openxmlformats.org/drawingml/2006/main">
               <a:ext uri="{FF2B5EF4-FFF2-40B4-BE49-F238E27FC236}">
-                <a16:creationId xmlns:a16="http://schemas.microsoft.com/office/drawing/2014/main" id="{C7EA0FCF-B983-4041-A8B3-584649356F8A}"/>
+                <a16:creationId xmlns:a16="http://schemas.microsoft.com/office/drawing/2014/main" id="{E0DFC619-D10F-4363-B583-A1FAC23C15FB}"/>
               </a:ext>
             </a:extLst>
           </p:cNvPr>
@@ -6379,7 +6379,7 @@
           <p:cNvPr id="6" name="Chart">
             <a:extLst xmlns:a="http://schemas.openxmlformats.org/drawingml/2006/main">
               <a:ext uri="{FF2B5EF4-FFF2-40B4-BE49-F238E27FC236}">
-                <a16:creationId xmlns:a16="http://schemas.microsoft.com/office/drawing/2014/main" id="{CA54F58E-BBC1-4803-B2EC-142BE5834419}"/>
+                <a16:creationId xmlns:a16="http://schemas.microsoft.com/office/drawing/2014/main" id="{491C8065-FB1D-4684-8B66-44F954883906}"/>
               </a:ext>
             </a:extLst>
           </p:cNvPr>
@@ -6392,7 +6392,7 @@
         </p:xfrm>
         <a:graphic xmlns:a="http://schemas.openxmlformats.org/drawingml/2006/main">
           <a:graphicData uri="http://schemas.openxmlformats.org/drawingml/2006/chart">
-            <c:chart xmlns:r="http://schemas.openxmlformats.org/officeDocument/2006/relationships" xmlns:c="http://schemas.openxmlformats.org/drawingml/2006/chart" r:id="R19e6bae9bc6049c0"/>
+            <c:chart xmlns:r="http://schemas.openxmlformats.org/officeDocument/2006/relationships" xmlns:c="http://schemas.openxmlformats.org/drawingml/2006/chart" r:id="Rb60d93c3799b4223"/>
           </a:graphicData>
         </a:graphic>
       </p:graphicFrame>
@@ -6401,7 +6401,7 @@
           <p:cNvPr id="7" name="">
             <a:extLst xmlns:a="http://schemas.openxmlformats.org/drawingml/2006/main">
               <a:ext uri="{FF2B5EF4-FFF2-40B4-BE49-F238E27FC236}">
-                <a16:creationId xmlns:a16="http://schemas.microsoft.com/office/drawing/2014/main" id="{9938A5B7-CBEE-45AB-BB9A-9BC9CFE0CEEE}"/>
+                <a16:creationId xmlns:a16="http://schemas.microsoft.com/office/drawing/2014/main" id="{6CAB9F22-B0FF-4F3E-8BE4-60ABFCCCCDB0}"/>
               </a:ext>
             </a:extLst>
           </p:cNvPr>
@@ -6465,7 +6465,7 @@
     </p:spTree>
     <p:extLst>
       <p:ext uri="{BB962C8B-B14F-4D97-AF65-F5344CB8AC3E}">
-        <p14:creationId xmlns:p14="http://schemas.microsoft.com/office/powerpoint/2010/main" val="1918537011"/>
+        <p14:creationId xmlns:p14="http://schemas.microsoft.com/office/powerpoint/2010/main" val="392853026"/>
       </p:ext>
     </p:extLst>
   </p:cSld>
@@ -6496,7 +6496,7 @@
           <p:cNvPr id="7" name="">
             <a:extLst xmlns:a="http://schemas.openxmlformats.org/drawingml/2006/main">
               <a:ext uri="{FF2B5EF4-FFF2-40B4-BE49-F238E27FC236}">
-                <a16:creationId xmlns:a16="http://schemas.microsoft.com/office/drawing/2014/main" id="{FE30701E-1517-4EEC-9338-42903567BA62}"/>
+                <a16:creationId xmlns:a16="http://schemas.microsoft.com/office/drawing/2014/main" id="{29899940-9579-41C3-A16D-EAD29E972F72}"/>
               </a:ext>
             </a:extLst>
           </p:cNvPr>
@@ -6562,7 +6562,7 @@
           <p:cNvPr id="2" name="">
             <a:extLst xmlns:a="http://schemas.openxmlformats.org/drawingml/2006/main">
               <a:ext uri="{FF2B5EF4-FFF2-40B4-BE49-F238E27FC236}">
-                <a16:creationId xmlns:a16="http://schemas.microsoft.com/office/drawing/2014/main" id="{3C6978B2-5281-429A-8ADD-99C9D47C0099}"/>
+                <a16:creationId xmlns:a16="http://schemas.microsoft.com/office/drawing/2014/main" id="{21C5893A-0646-485F-A907-EE3443891061}"/>
               </a:ext>
             </a:extLst>
           </p:cNvPr>
@@ -6628,7 +6628,7 @@
           <p:cNvPr id="3" name="">
             <a:extLst xmlns:a="http://schemas.openxmlformats.org/drawingml/2006/main">
               <a:ext uri="{FF2B5EF4-FFF2-40B4-BE49-F238E27FC236}">
-                <a16:creationId xmlns:a16="http://schemas.microsoft.com/office/drawing/2014/main" id="{6C461A56-4C59-4D27-9A4D-DDF526D585DA}"/>
+                <a16:creationId xmlns:a16="http://schemas.microsoft.com/office/drawing/2014/main" id="{39A539D5-F22B-4634-B47E-C3F4508E1DBA}"/>
               </a:ext>
             </a:extLst>
           </p:cNvPr>
@@ -6694,7 +6694,7 @@
           <p:cNvPr id="4" name="">
             <a:extLst xmlns:a="http://schemas.openxmlformats.org/drawingml/2006/main">
               <a:ext uri="{FF2B5EF4-FFF2-40B4-BE49-F238E27FC236}">
-                <a16:creationId xmlns:a16="http://schemas.microsoft.com/office/drawing/2014/main" id="{2A799F4E-F47D-46C6-B69A-A7EF60E6A66E}"/>
+                <a16:creationId xmlns:a16="http://schemas.microsoft.com/office/drawing/2014/main" id="{3DEF041D-7C43-4C1B-B041-6464F5C53D2A}"/>
               </a:ext>
             </a:extLst>
           </p:cNvPr>
@@ -6760,7 +6760,7 @@
           <p:cNvPr id="5" name="">
             <a:extLst xmlns:a="http://schemas.openxmlformats.org/drawingml/2006/main">
               <a:ext uri="{FF2B5EF4-FFF2-40B4-BE49-F238E27FC236}">
-                <a16:creationId xmlns:a16="http://schemas.microsoft.com/office/drawing/2014/main" id="{186F764F-442E-4CAB-9C31-6ADCC7D4C6BE}"/>
+                <a16:creationId xmlns:a16="http://schemas.microsoft.com/office/drawing/2014/main" id="{65392D32-9454-4AB0-A80B-22BF2C9EF0E1}"/>
               </a:ext>
             </a:extLst>
           </p:cNvPr>
@@ -6826,7 +6826,7 @@
           <p:cNvPr id="6" name="">
             <a:extLst xmlns:a="http://schemas.openxmlformats.org/drawingml/2006/main">
               <a:ext uri="{FF2B5EF4-FFF2-40B4-BE49-F238E27FC236}">
-                <a16:creationId xmlns:a16="http://schemas.microsoft.com/office/drawing/2014/main" id="{C8820E55-ABF1-45B4-AF53-CFC259DDC394}"/>
+                <a16:creationId xmlns:a16="http://schemas.microsoft.com/office/drawing/2014/main" id="{5933C893-4197-4CB9-9A4D-28481B94B01E}"/>
               </a:ext>
             </a:extLst>
           </p:cNvPr>
@@ -7223,7 +7223,7 @@
     </p:spTree>
     <p:extLst>
       <p:ext uri="{BB962C8B-B14F-4D97-AF65-F5344CB8AC3E}">
-        <p14:creationId xmlns:p14="http://schemas.microsoft.com/office/powerpoint/2010/main" val="1207212247"/>
+        <p14:creationId xmlns:p14="http://schemas.microsoft.com/office/powerpoint/2010/main" val="1152512029"/>
       </p:ext>
     </p:extLst>
   </p:cSld>
@@ -7254,7 +7254,7 @@
           <p:cNvPr id="8" name="">
             <a:extLst xmlns:a="http://schemas.openxmlformats.org/drawingml/2006/main">
               <a:ext uri="{FF2B5EF4-FFF2-40B4-BE49-F238E27FC236}">
-                <a16:creationId xmlns:a16="http://schemas.microsoft.com/office/drawing/2014/main" id="{66DDCEFB-2D54-40A5-AE83-2FD3E57F1925}"/>
+                <a16:creationId xmlns:a16="http://schemas.microsoft.com/office/drawing/2014/main" id="{13EEC2D9-222D-406F-8FF7-E4E8DB8FA10D}"/>
               </a:ext>
             </a:extLst>
           </p:cNvPr>
@@ -7320,7 +7320,7 @@
           <p:cNvPr id="2" name="">
             <a:extLst xmlns:a="http://schemas.openxmlformats.org/drawingml/2006/main">
               <a:ext uri="{FF2B5EF4-FFF2-40B4-BE49-F238E27FC236}">
-                <a16:creationId xmlns:a16="http://schemas.microsoft.com/office/drawing/2014/main" id="{A6FD4B2C-E5AC-48B6-A47E-C09CF8ECE0AE}"/>
+                <a16:creationId xmlns:a16="http://schemas.microsoft.com/office/drawing/2014/main" id="{33226DBF-CE43-48A1-8FAD-C2144B3D509C}"/>
               </a:ext>
             </a:extLst>
           </p:cNvPr>
@@ -7386,7 +7386,7 @@
           <p:cNvPr id="3" name="">
             <a:extLst xmlns:a="http://schemas.openxmlformats.org/drawingml/2006/main">
               <a:ext uri="{FF2B5EF4-FFF2-40B4-BE49-F238E27FC236}">
-                <a16:creationId xmlns:a16="http://schemas.microsoft.com/office/drawing/2014/main" id="{E8980FB7-FDE2-4C33-A02C-DBD2CE9B9854}"/>
+                <a16:creationId xmlns:a16="http://schemas.microsoft.com/office/drawing/2014/main" id="{9FEBC737-ABF7-4AB7-A3FE-BD65A23D408C}"/>
               </a:ext>
             </a:extLst>
           </p:cNvPr>
@@ -7442,7 +7442,7 @@
                 <a:ea typeface="Arial"/>
                 <a:cs typeface="Arial"/>
               </a:rPr>
-              <a:t>Ретроспективное восстановление скрытой зарплаты организаций: 1 419 ID, 67 регионов. MAE логарифма, с равным весом регионов; меньше лучше.</a:t>
+              <a:t>Ретроспективное восстановление скрытой зарплаты работников организаций: 1 419 ID, 67 регионов. MAE логарифма, с равным весом регионов; меньше лучше.</a:t>
             </a:r>
           </a:p>
         </p:txBody>
@@ -7452,7 +7452,7 @@
           <p:cNvPr id="4" name="">
             <a:extLst xmlns:a="http://schemas.openxmlformats.org/drawingml/2006/main">
               <a:ext uri="{FF2B5EF4-FFF2-40B4-BE49-F238E27FC236}">
-                <a16:creationId xmlns:a16="http://schemas.microsoft.com/office/drawing/2014/main" id="{9B1B3C32-FB40-427C-9E86-C5E266AC9F0C}"/>
+                <a16:creationId xmlns:a16="http://schemas.microsoft.com/office/drawing/2014/main" id="{F50403D1-BA44-4B58-958D-FEBD244AE732}"/>
               </a:ext>
             </a:extLst>
           </p:cNvPr>
@@ -7518,7 +7518,7 @@
           <p:cNvPr id="5" name="">
             <a:extLst xmlns:a="http://schemas.openxmlformats.org/drawingml/2006/main">
               <a:ext uri="{FF2B5EF4-FFF2-40B4-BE49-F238E27FC236}">
-                <a16:creationId xmlns:a16="http://schemas.microsoft.com/office/drawing/2014/main" id="{E866A8ED-4074-4DD6-A1F1-0E3FB32D9034}"/>
+                <a16:creationId xmlns:a16="http://schemas.microsoft.com/office/drawing/2014/main" id="{44A52EAC-A03D-4488-BFAB-65F11530C6CD}"/>
               </a:ext>
             </a:extLst>
           </p:cNvPr>
@@ -7584,7 +7584,7 @@
           <p:cNvPr id="6" name="Chart">
             <a:extLst xmlns:a="http://schemas.openxmlformats.org/drawingml/2006/main">
               <a:ext uri="{FF2B5EF4-FFF2-40B4-BE49-F238E27FC236}">
-                <a16:creationId xmlns:a16="http://schemas.microsoft.com/office/drawing/2014/main" id="{3BE1594B-B645-4BDA-97B0-6413DC152F66}"/>
+                <a16:creationId xmlns:a16="http://schemas.microsoft.com/office/drawing/2014/main" id="{8DB228EB-A00C-4EBF-8ACD-D31D7A758B4B}"/>
               </a:ext>
             </a:extLst>
           </p:cNvPr>
@@ -7597,7 +7597,7 @@
         </p:xfrm>
         <a:graphic xmlns:a="http://schemas.openxmlformats.org/drawingml/2006/main">
           <a:graphicData uri="http://schemas.openxmlformats.org/drawingml/2006/chart">
-            <c:chart xmlns:r="http://schemas.openxmlformats.org/officeDocument/2006/relationships" xmlns:c="http://schemas.openxmlformats.org/drawingml/2006/chart" r:id="Rcdbc30a005c5437f"/>
+            <c:chart xmlns:r="http://schemas.openxmlformats.org/officeDocument/2006/relationships" xmlns:c="http://schemas.openxmlformats.org/drawingml/2006/chart" r:id="R8911ac79d5fc4eb6"/>
           </a:graphicData>
         </a:graphic>
       </p:graphicFrame>
@@ -7606,7 +7606,7 @@
           <p:cNvPr id="7" name="">
             <a:extLst xmlns:a="http://schemas.openxmlformats.org/drawingml/2006/main">
               <a:ext uri="{FF2B5EF4-FFF2-40B4-BE49-F238E27FC236}">
-                <a16:creationId xmlns:a16="http://schemas.microsoft.com/office/drawing/2014/main" id="{412FC0FC-F575-4A38-807D-5CED310391AF}"/>
+                <a16:creationId xmlns:a16="http://schemas.microsoft.com/office/drawing/2014/main" id="{99C96020-5A30-416C-B7E8-8347575C6E34}"/>
               </a:ext>
             </a:extLst>
           </p:cNvPr>
@@ -7662,7 +7662,7 @@
                 <a:ea typeface="Arial"/>
                 <a:cs typeface="Arial"/>
               </a:rPr>
-              <a:t>Кластер помогает начать описание, но не заменяет проверку близости исходных профилей. Жёсткое ограничение круга аналогов ухудшило ошибку и покрытие.</a:t>
+              <a:t>Кластер помогает начать описание, но не заменяет проверку близости исходных профилей. Жёсткое ограничение круга аналогов увеличило ошибку и сократило охват.</a:t>
             </a:r>
           </a:p>
         </p:txBody>
@@ -7670,7 +7670,7 @@
     </p:spTree>
     <p:extLst>
       <p:ext uri="{BB962C8B-B14F-4D97-AF65-F5344CB8AC3E}">
-        <p14:creationId xmlns:p14="http://schemas.microsoft.com/office/powerpoint/2010/main" val="289775945"/>
+        <p14:creationId xmlns:p14="http://schemas.microsoft.com/office/powerpoint/2010/main" val="2032167765"/>
       </p:ext>
     </p:extLst>
   </p:cSld>
@@ -7698,10 +7698,10 @@
       </p:grpSpPr>
       <p:sp>
         <p:nvSpPr>
-          <p:cNvPr id="9" name="">
+          <p:cNvPr id="10" name="">
             <a:extLst xmlns:a="http://schemas.openxmlformats.org/drawingml/2006/main">
               <a:ext uri="{FF2B5EF4-FFF2-40B4-BE49-F238E27FC236}">
-                <a16:creationId xmlns:a16="http://schemas.microsoft.com/office/drawing/2014/main" id="{4A37A713-1C88-4724-9D3D-FAA99BA3CCFF}"/>
+                <a16:creationId xmlns:a16="http://schemas.microsoft.com/office/drawing/2014/main" id="{37F51BDD-9AFB-4B95-9AF0-E15C8DB13544}"/>
               </a:ext>
             </a:extLst>
           </p:cNvPr>
@@ -7767,7 +7767,7 @@
           <p:cNvPr id="2" name="">
             <a:extLst xmlns:a="http://schemas.openxmlformats.org/drawingml/2006/main">
               <a:ext uri="{FF2B5EF4-FFF2-40B4-BE49-F238E27FC236}">
-                <a16:creationId xmlns:a16="http://schemas.microsoft.com/office/drawing/2014/main" id="{93B8A2EB-5312-45D6-87B3-36728C284610}"/>
+                <a16:creationId xmlns:a16="http://schemas.microsoft.com/office/drawing/2014/main" id="{C06FF9CB-11FE-4211-95C1-85A1B42B159B}"/>
               </a:ext>
             </a:extLst>
           </p:cNvPr>
@@ -7833,7 +7833,7 @@
           <p:cNvPr id="3" name="">
             <a:extLst xmlns:a="http://schemas.openxmlformats.org/drawingml/2006/main">
               <a:ext uri="{FF2B5EF4-FFF2-40B4-BE49-F238E27FC236}">
-                <a16:creationId xmlns:a16="http://schemas.microsoft.com/office/drawing/2014/main" id="{72A50C6C-C936-47B5-B38E-54D18166759E}"/>
+                <a16:creationId xmlns:a16="http://schemas.microsoft.com/office/drawing/2014/main" id="{03D56112-C2DC-4DDC-A330-93F0DB760401}"/>
               </a:ext>
             </a:extLst>
           </p:cNvPr>
@@ -7899,7 +7899,7 @@
           <p:cNvPr id="4" name="">
             <a:extLst xmlns:a="http://schemas.openxmlformats.org/drawingml/2006/main">
               <a:ext uri="{FF2B5EF4-FFF2-40B4-BE49-F238E27FC236}">
-                <a16:creationId xmlns:a16="http://schemas.microsoft.com/office/drawing/2014/main" id="{5C3E23A7-7EC7-4BED-9404-5154C01FA24F}"/>
+                <a16:creationId xmlns:a16="http://schemas.microsoft.com/office/drawing/2014/main" id="{0A6EFA16-BA4D-4193-A7F8-A4357AC151D1}"/>
               </a:ext>
             </a:extLst>
           </p:cNvPr>
@@ -7965,7 +7965,7 @@
           <p:cNvPr id="5" name="">
             <a:extLst xmlns:a="http://schemas.openxmlformats.org/drawingml/2006/main">
               <a:ext uri="{FF2B5EF4-FFF2-40B4-BE49-F238E27FC236}">
-                <a16:creationId xmlns:a16="http://schemas.microsoft.com/office/drawing/2014/main" id="{41F78693-030E-4C97-B72C-9BF5EF7F971F}"/>
+                <a16:creationId xmlns:a16="http://schemas.microsoft.com/office/drawing/2014/main" id="{A1B7FFB7-31FB-4184-9741-D19105FBCCE4}"/>
               </a:ext>
             </a:extLst>
           </p:cNvPr>
@@ -8031,7 +8031,7 @@
           <p:cNvPr id="6" name="">
             <a:extLst xmlns:a="http://schemas.openxmlformats.org/drawingml/2006/main">
               <a:ext uri="{FF2B5EF4-FFF2-40B4-BE49-F238E27FC236}">
-                <a16:creationId xmlns:a16="http://schemas.microsoft.com/office/drawing/2014/main" id="{579867E2-1CCE-4F58-AE22-7BCC55E44837}"/>
+                <a16:creationId xmlns:a16="http://schemas.microsoft.com/office/drawing/2014/main" id="{A7E6D574-566A-41E8-B640-A6C267E2AE12}"/>
               </a:ext>
             </a:extLst>
           </p:cNvPr>
@@ -8041,7 +8041,7 @@
           <p:nvPr/>
         </p:nvPicPr>
         <p:blipFill>
-          <a:blip xmlns:r="http://schemas.openxmlformats.org/officeDocument/2006/relationships" xmlns:a="http://schemas.openxmlformats.org/drawingml/2006/main" r:embed="Raa47d268a71c40c4"/>
+          <a:blip xmlns:r="http://schemas.openxmlformats.org/officeDocument/2006/relationships" xmlns:a="http://schemas.openxmlformats.org/drawingml/2006/main" r:embed="R94b1de06d99d4ee2"/>
           <a:stretch xmlns:a="http://schemas.openxmlformats.org/drawingml/2006/main"/>
         </p:blipFill>
         <p:spPr>
@@ -8059,7 +8059,7 @@
           <p:cNvPr id="7" name="">
             <a:extLst xmlns:a="http://schemas.openxmlformats.org/drawingml/2006/main">
               <a:ext uri="{FF2B5EF4-FFF2-40B4-BE49-F238E27FC236}">
-                <a16:creationId xmlns:a16="http://schemas.microsoft.com/office/drawing/2014/main" id="{3E37E535-A883-4854-B664-35AF368860F6}"/>
+                <a16:creationId xmlns:a16="http://schemas.microsoft.com/office/drawing/2014/main" id="{F3828F13-6DFB-48CA-A187-B005330420C3}"/>
               </a:ext>
             </a:extLst>
           </p:cNvPr>
@@ -8070,8 +8070,8 @@
         </p:nvSpPr>
         <p:spPr>
           <a:xfrm xmlns:a="http://schemas.openxmlformats.org/drawingml/2006/main">
-            <a:off x="8334375" y="2619375"/>
-            <a:ext cx="3333750" cy="1905000"/>
+            <a:off x="8334375" y="2505075"/>
+            <a:ext cx="3333750" cy="628650"/>
           </a:xfrm>
           <a:prstGeom xmlns:a="http://schemas.openxmlformats.org/drawingml/2006/main" prst="rect">
             <a:avLst/>
@@ -8085,7 +8085,7 @@
           <a:bodyPr xmlns:a="http://schemas.openxmlformats.org/drawingml/2006/main" lIns="0" tIns="0" rIns="0" bIns="0"/>
           <a:lstStyle xmlns:a="http://schemas.openxmlformats.org/drawingml/2006/main">
             <a:defPPr>
-              <a:defRPr sz="2175" b="1">
+              <a:defRPr sz="2025" b="1">
                 <a:solidFill>
                   <a:srgbClr val="171717"/>
                 </a:solidFill>
@@ -8097,7 +8097,7 @@
           </a:lstStyle>
           <a:p xmlns:a="http://schemas.openxmlformats.org/drawingml/2006/main">
             <a:pPr>
-              <a:defRPr sz="2175" b="1">
+              <a:defRPr sz="2025" b="1">
                 <a:solidFill>
                   <a:srgbClr val="171717"/>
                 </a:solidFill>
@@ -8107,7 +8107,7 @@
               </a:defRPr>
             </a:pPr>
             <a:r>
-              <a:rPr sz="2175" b="1">
+              <a:rPr sz="2025" b="1">
                 <a:solidFill>
                   <a:srgbClr val="171717"/>
                 </a:solidFill>
@@ -8115,76 +8115,7 @@
                 <a:ea typeface="Arial"/>
                 <a:cs typeface="Arial"/>
               </a:rPr>
-              <a:t>3 модели</a:t>
-            </a:r>
-          </a:p>
-          <a:p xmlns:a="http://schemas.openxmlformats.org/drawingml/2006/main">
-            <a:pPr>
-              <a:defRPr sz="2175" b="1">
-                <a:solidFill>
-                  <a:srgbClr val="171717"/>
-                </a:solidFill>
-                <a:latin typeface="Arial"/>
-                <a:ea typeface="Arial"/>
-                <a:cs typeface="Arial"/>
-              </a:defRPr>
-            </a:pPr>
-            <a:r>
-              <a:rPr sz="2175" b="1">
-                <a:solidFill>
-                  <a:srgbClr val="171717"/>
-                </a:solidFill>
-                <a:latin typeface="Arial"/>
-                <a:ea typeface="Arial"/>
-                <a:cs typeface="Arial"/>
-              </a:rPr>
-              <a:t>24 месяца</a:t>
-            </a:r>
-          </a:p>
-          <a:p xmlns:a="http://schemas.openxmlformats.org/drawingml/2006/main">
-            <a:pPr>
-              <a:defRPr sz="2175" b="1">
-                <a:solidFill>
-                  <a:srgbClr val="171717"/>
-                </a:solidFill>
-                <a:latin typeface="Arial"/>
-                <a:ea typeface="Arial"/>
-                <a:cs typeface="Arial"/>
-              </a:defRPr>
-            </a:pPr>
-            <a:r>
-              <a:rPr sz="2175" b="1">
-                <a:solidFill>
-                  <a:srgbClr val="171717"/>
-                </a:solidFill>
-                <a:latin typeface="Arial"/>
-                <a:ea typeface="Arial"/>
-                <a:cs typeface="Arial"/>
-              </a:rPr>
-              <a:t>Паспорт территории</a:t>
-            </a:r>
-          </a:p>
-          <a:p xmlns:a="http://schemas.openxmlformats.org/drawingml/2006/main">
-            <a:pPr>
-              <a:defRPr sz="2175" b="1">
-                <a:solidFill>
-                  <a:srgbClr val="171717"/>
-                </a:solidFill>
-                <a:latin typeface="Arial"/>
-                <a:ea typeface="Arial"/>
-                <a:cs typeface="Arial"/>
-              </a:defRPr>
-            </a:pPr>
-            <a:r>
-              <a:rPr sz="2175" b="1">
-                <a:solidFill>
-                  <a:srgbClr val="171717"/>
-                </a:solidFill>
-                <a:latin typeface="Arial"/>
-                <a:ea typeface="Arial"/>
-                <a:cs typeface="Arial"/>
-              </a:rPr>
-              <a:t>6 индексов качества</a:t>
+              <a:t>Аналоги Екатеринбурга</a:t>
             </a:r>
           </a:p>
         </p:txBody>
@@ -8194,7 +8125,7 @@
           <p:cNvPr id="8" name="">
             <a:extLst xmlns:a="http://schemas.openxmlformats.org/drawingml/2006/main">
               <a:ext uri="{FF2B5EF4-FFF2-40B4-BE49-F238E27FC236}">
-                <a16:creationId xmlns:a16="http://schemas.microsoft.com/office/drawing/2014/main" id="{101CD17A-ACD2-4419-A913-45468E5E8907}"/>
+                <a16:creationId xmlns:a16="http://schemas.microsoft.com/office/drawing/2014/main" id="{A9BB0853-86E8-42FB-A6B8-6FB87E47AB80}"/>
               </a:ext>
             </a:extLst>
           </p:cNvPr>
@@ -8205,8 +8136,8 @@
         </p:nvSpPr>
         <p:spPr>
           <a:xfrm xmlns:a="http://schemas.openxmlformats.org/drawingml/2006/main">
-            <a:off x="8334375" y="4848225"/>
-            <a:ext cx="3305175" cy="1304925"/>
+            <a:off x="8334375" y="3219450"/>
+            <a:ext cx="3333750" cy="1647825"/>
           </a:xfrm>
           <a:prstGeom xmlns:a="http://schemas.openxmlformats.org/drawingml/2006/main" prst="rect">
             <a:avLst/>
@@ -8220,7 +8151,7 @@
           <a:bodyPr xmlns:a="http://schemas.openxmlformats.org/drawingml/2006/main" lIns="0" tIns="0" rIns="0" bIns="0"/>
           <a:lstStyle xmlns:a="http://schemas.openxmlformats.org/drawingml/2006/main">
             <a:defPPr>
-              <a:defRPr sz="1725" b="0">
+              <a:defRPr sz="1650" b="0">
                 <a:solidFill>
                   <a:srgbClr val="171717"/>
                 </a:solidFill>
@@ -8232,7 +8163,7 @@
           </a:lstStyle>
           <a:p xmlns:a="http://schemas.openxmlformats.org/drawingml/2006/main">
             <a:pPr>
-              <a:defRPr sz="1725" b="0">
+              <a:defRPr sz="1650" b="0">
                 <a:solidFill>
                   <a:srgbClr val="171717"/>
                 </a:solidFill>
@@ -8242,7 +8173,7 @@
               </a:defRPr>
             </a:pPr>
             <a:r>
-              <a:rPr sz="1725" b="0">
+              <a:rPr sz="1650" b="0">
                 <a:solidFill>
                   <a:srgbClr val="171717"/>
                 </a:solidFill>
@@ -8250,7 +8181,96 @@
                 <a:ea typeface="Arial"/>
                 <a:cs typeface="Arial"/>
               </a:rPr>
-              <a:t>На экране — подмножество рёбер. Проекция расходного пространства не является географической картой.</a:t>
+              <a:t>По Total: Красноярск, Тюмень, Нижний Новгород.</a:t>
+            </a:r>
+          </a:p>
+          <a:p xmlns:a="http://schemas.openxmlformats.org/drawingml/2006/main">
+            <a:pPr>
+              <a:defRPr sz="1650" b="0">
+                <a:solidFill>
+                  <a:srgbClr val="171717"/>
+                </a:solidFill>
+                <a:latin typeface="Arial"/>
+                <a:ea typeface="Arial"/>
+                <a:cs typeface="Arial"/>
+              </a:defRPr>
+            </a:pPr>
+            <a:r>
+              <a:rPr sz="1650" b="0">
+                <a:solidFill>
+                  <a:srgbClr val="171717"/>
+                </a:solidFill>
+                <a:latin typeface="Arial"/>
+                <a:ea typeface="Arial"/>
+                <a:cs typeface="Arial"/>
+              </a:rPr>
+              <a:t>По контексту: Пермский городской округ, Нижний Новгород, Тюмень.</a:t>
+            </a:r>
+          </a:p>
+        </p:txBody>
+      </p:sp>
+      <p:sp>
+        <p:nvSpPr>
+          <p:cNvPr id="9" name="">
+            <a:extLst xmlns:a="http://schemas.openxmlformats.org/drawingml/2006/main">
+              <a:ext uri="{FF2B5EF4-FFF2-40B4-BE49-F238E27FC236}">
+                <a16:creationId xmlns:a16="http://schemas.microsoft.com/office/drawing/2014/main" id="{DC87FB93-B0D0-45C5-B126-7DD48951A1AE}"/>
+              </a:ext>
+            </a:extLst>
+          </p:cNvPr>
+          <p:cNvSpPr>
+            <a:spLocks xmlns:a="http://schemas.openxmlformats.org/drawingml/2006/main" noGrp="1"/>
+          </p:cNvSpPr>
+          <p:nvPr/>
+        </p:nvSpPr>
+        <p:spPr>
+          <a:xfrm xmlns:a="http://schemas.openxmlformats.org/drawingml/2006/main">
+            <a:off x="8334375" y="4991100"/>
+            <a:ext cx="3305175" cy="1162050"/>
+          </a:xfrm>
+          <a:prstGeom xmlns:a="http://schemas.openxmlformats.org/drawingml/2006/main" prst="rect">
+            <a:avLst/>
+          </a:prstGeom>
+          <a:noFill xmlns:a="http://schemas.openxmlformats.org/drawingml/2006/main"/>
+          <a:ln xmlns:a="http://schemas.openxmlformats.org/drawingml/2006/main" w="0">
+            <a:noFill/>
+          </a:ln>
+        </p:spPr>
+        <p:txBody>
+          <a:bodyPr xmlns:a="http://schemas.openxmlformats.org/drawingml/2006/main" lIns="0" tIns="0" rIns="0" bIns="0"/>
+          <a:lstStyle xmlns:a="http://schemas.openxmlformats.org/drawingml/2006/main">
+            <a:defPPr>
+              <a:defRPr sz="1575" b="0">
+                <a:solidFill>
+                  <a:srgbClr val="171717"/>
+                </a:solidFill>
+                <a:latin typeface="Arial"/>
+                <a:ea typeface="Arial"/>
+                <a:cs typeface="Arial"/>
+              </a:defRPr>
+            </a:defPPr>
+          </a:lstStyle>
+          <a:p xmlns:a="http://schemas.openxmlformats.org/drawingml/2006/main">
+            <a:pPr>
+              <a:defRPr sz="1575" b="0">
+                <a:solidFill>
+                  <a:srgbClr val="171717"/>
+                </a:solidFill>
+                <a:latin typeface="Arial"/>
+                <a:ea typeface="Arial"/>
+                <a:cs typeface="Arial"/>
+              </a:defRPr>
+            </a:pPr>
+            <a:r>
+              <a:rPr sz="1575" b="0">
+                <a:solidFill>
+                  <a:srgbClr val="171717"/>
+                </a:solidFill>
+                <a:latin typeface="Arial"/>
+                <a:ea typeface="Arial"/>
+                <a:cs typeface="Arial"/>
+              </a:rPr>
+              <a:t>На экране показана часть рёбер. Проекция расходов не является географической картой.</a:t>
             </a:r>
           </a:p>
         </p:txBody>
@@ -8258,7 +8278,7 @@
     </p:spTree>
     <p:extLst>
       <p:ext uri="{BB962C8B-B14F-4D97-AF65-F5344CB8AC3E}">
-        <p14:creationId xmlns:p14="http://schemas.microsoft.com/office/powerpoint/2010/main" val="1726216543"/>
+        <p14:creationId xmlns:p14="http://schemas.microsoft.com/office/powerpoint/2010/main" val="224300129"/>
       </p:ext>
     </p:extLst>
   </p:cSld>
@@ -8289,7 +8309,7 @@
           <p:cNvPr id="8" name="">
             <a:extLst xmlns:a="http://schemas.openxmlformats.org/drawingml/2006/main">
               <a:ext uri="{FF2B5EF4-FFF2-40B4-BE49-F238E27FC236}">
-                <a16:creationId xmlns:a16="http://schemas.microsoft.com/office/drawing/2014/main" id="{45B9E956-9B83-43EB-9479-CD57A75DE786}"/>
+                <a16:creationId xmlns:a16="http://schemas.microsoft.com/office/drawing/2014/main" id="{117715A1-38C1-40FD-842D-9F87D7EA42D8}"/>
               </a:ext>
             </a:extLst>
           </p:cNvPr>
@@ -8355,7 +8375,7 @@
           <p:cNvPr id="2" name="">
             <a:extLst xmlns:a="http://schemas.openxmlformats.org/drawingml/2006/main">
               <a:ext uri="{FF2B5EF4-FFF2-40B4-BE49-F238E27FC236}">
-                <a16:creationId xmlns:a16="http://schemas.microsoft.com/office/drawing/2014/main" id="{2893D292-E0B5-46FC-9063-6F3D4AEF925E}"/>
+                <a16:creationId xmlns:a16="http://schemas.microsoft.com/office/drawing/2014/main" id="{3275BFD8-357C-4D81-99DE-9142C8B97433}"/>
               </a:ext>
             </a:extLst>
           </p:cNvPr>
@@ -8421,7 +8441,7 @@
           <p:cNvPr id="3" name="">
             <a:extLst xmlns:a="http://schemas.openxmlformats.org/drawingml/2006/main">
               <a:ext uri="{FF2B5EF4-FFF2-40B4-BE49-F238E27FC236}">
-                <a16:creationId xmlns:a16="http://schemas.microsoft.com/office/drawing/2014/main" id="{26B7F74F-D90A-49DB-A15C-02A8ACD50136}"/>
+                <a16:creationId xmlns:a16="http://schemas.microsoft.com/office/drawing/2014/main" id="{D2C90365-DCB2-4641-BE88-FEE1965D5DC4}"/>
               </a:ext>
             </a:extLst>
           </p:cNvPr>
@@ -8487,7 +8507,7 @@
           <p:cNvPr id="4" name="">
             <a:extLst xmlns:a="http://schemas.openxmlformats.org/drawingml/2006/main">
               <a:ext uri="{FF2B5EF4-FFF2-40B4-BE49-F238E27FC236}">
-                <a16:creationId xmlns:a16="http://schemas.microsoft.com/office/drawing/2014/main" id="{0B9B48C6-FB77-4EB5-86E7-49B11367E77C}"/>
+                <a16:creationId xmlns:a16="http://schemas.microsoft.com/office/drawing/2014/main" id="{74E2258F-7557-4941-8A3B-CD430E710DA1}"/>
               </a:ext>
             </a:extLst>
           </p:cNvPr>
@@ -8553,7 +8573,7 @@
           <p:cNvPr id="5" name="">
             <a:extLst xmlns:a="http://schemas.openxmlformats.org/drawingml/2006/main">
               <a:ext uri="{FF2B5EF4-FFF2-40B4-BE49-F238E27FC236}">
-                <a16:creationId xmlns:a16="http://schemas.microsoft.com/office/drawing/2014/main" id="{FA28D93A-D324-46F5-AC89-1D171A6445AC}"/>
+                <a16:creationId xmlns:a16="http://schemas.microsoft.com/office/drawing/2014/main" id="{A8487007-04F4-4568-A622-03F70D78910A}"/>
               </a:ext>
             </a:extLst>
           </p:cNvPr>
@@ -8619,7 +8639,7 @@
           <p:cNvPr id="6" name="">
             <a:extLst xmlns:a="http://schemas.openxmlformats.org/drawingml/2006/main">
               <a:ext uri="{FF2B5EF4-FFF2-40B4-BE49-F238E27FC236}">
-                <a16:creationId xmlns:a16="http://schemas.microsoft.com/office/drawing/2014/main" id="{56221E14-6E7C-4573-BFFF-04534BA71636}"/>
+                <a16:creationId xmlns:a16="http://schemas.microsoft.com/office/drawing/2014/main" id="{43A8DD0F-2AF6-4A6C-9370-F9766ADCEDB7}"/>
               </a:ext>
             </a:extLst>
           </p:cNvPr>
@@ -8695,7 +8715,7 @@
                     <a:lstStyle/>
                     <a:p>
                       <a:r>
-                        <a:rPr sz="1650" b="0">
+                        <a:rPr sz="1500" b="0">
                           <a:solidFill>
                             <a:srgbClr val="171717"/>
                           </a:solidFill>
@@ -8703,7 +8723,20 @@
                           <a:ea typeface="Arial"/>
                           <a:cs typeface="Arial"/>
                         </a:rPr>
-                        <a:t>python -B release.py verify</a:t>
+                        <a:t>python -B research/release.py verify</a:t>
+                      </a:r>
+                    </a:p>
+                    <a:p>
+                      <a:r>
+                        <a:rPr sz="1500" b="0">
+                          <a:solidFill>
+                            <a:srgbClr val="171717"/>
+                          </a:solidFill>
+                          <a:latin typeface="Arial"/>
+                          <a:ea typeface="Arial"/>
+                          <a:cs typeface="Arial"/>
+                        </a:rPr>
+                        <a:t>из корня репозитория</a:t>
                       </a:r>
                     </a:p>
                   </a:txBody>
@@ -8897,7 +8930,7 @@
           <p:cNvPr id="7" name="">
             <a:extLst xmlns:a="http://schemas.openxmlformats.org/drawingml/2006/main">
               <a:ext uri="{FF2B5EF4-FFF2-40B4-BE49-F238E27FC236}">
-                <a16:creationId xmlns:a16="http://schemas.microsoft.com/office/drawing/2014/main" id="{A3D2DF7D-E6FC-4702-9E1D-55C1223335DD}"/>
+                <a16:creationId xmlns:a16="http://schemas.microsoft.com/office/drawing/2014/main" id="{1E9D15DF-43B1-4FCC-B4B5-F8E6A0044777}"/>
               </a:ext>
             </a:extLst>
           </p:cNvPr>
@@ -8961,7 +8994,7 @@
     </p:spTree>
     <p:extLst>
       <p:ext uri="{BB962C8B-B14F-4D97-AF65-F5344CB8AC3E}">
-        <p14:creationId xmlns:p14="http://schemas.microsoft.com/office/powerpoint/2010/main" val="139698687"/>
+        <p14:creationId xmlns:p14="http://schemas.microsoft.com/office/powerpoint/2010/main" val="148087801"/>
       </p:ext>
     </p:extLst>
   </p:cSld>
@@ -8992,7 +9025,7 @@
           <p:cNvPr id="10" name="">
             <a:extLst xmlns:a="http://schemas.openxmlformats.org/drawingml/2006/main">
               <a:ext uri="{FF2B5EF4-FFF2-40B4-BE49-F238E27FC236}">
-                <a16:creationId xmlns:a16="http://schemas.microsoft.com/office/drawing/2014/main" id="{E01ACAFC-F10B-4944-8EF9-0C0F2B1CD4F6}"/>
+                <a16:creationId xmlns:a16="http://schemas.microsoft.com/office/drawing/2014/main" id="{59697A26-3260-4ABF-AF81-5671C464DB92}"/>
               </a:ext>
             </a:extLst>
           </p:cNvPr>
@@ -9058,7 +9091,7 @@
           <p:cNvPr id="2" name="">
             <a:extLst xmlns:a="http://schemas.openxmlformats.org/drawingml/2006/main">
               <a:ext uri="{FF2B5EF4-FFF2-40B4-BE49-F238E27FC236}">
-                <a16:creationId xmlns:a16="http://schemas.microsoft.com/office/drawing/2014/main" id="{A7F36D83-BD23-4F8C-8CDD-CE39746230C3}"/>
+                <a16:creationId xmlns:a16="http://schemas.microsoft.com/office/drawing/2014/main" id="{8C6B5E54-6937-48D7-B2F4-E153C5138C14}"/>
               </a:ext>
             </a:extLst>
           </p:cNvPr>
@@ -9124,7 +9157,7 @@
           <p:cNvPr id="3" name="">
             <a:extLst xmlns:a="http://schemas.openxmlformats.org/drawingml/2006/main">
               <a:ext uri="{FF2B5EF4-FFF2-40B4-BE49-F238E27FC236}">
-                <a16:creationId xmlns:a16="http://schemas.microsoft.com/office/drawing/2014/main" id="{8489CFB4-13C7-4FFA-B2A1-B003EF334274}"/>
+                <a16:creationId xmlns:a16="http://schemas.microsoft.com/office/drawing/2014/main" id="{8439CDA2-70D5-49F2-804A-A428FC573A9F}"/>
               </a:ext>
             </a:extLst>
           </p:cNvPr>
@@ -9190,7 +9223,7 @@
           <p:cNvPr id="4" name="">
             <a:extLst xmlns:a="http://schemas.openxmlformats.org/drawingml/2006/main">
               <a:ext uri="{FF2B5EF4-FFF2-40B4-BE49-F238E27FC236}">
-                <a16:creationId xmlns:a16="http://schemas.microsoft.com/office/drawing/2014/main" id="{4AD64F29-5450-4374-91AF-1CEF825581FA}"/>
+                <a16:creationId xmlns:a16="http://schemas.microsoft.com/office/drawing/2014/main" id="{1986AA69-6B09-4E81-9BBC-5A27A1A6E856}"/>
               </a:ext>
             </a:extLst>
           </p:cNvPr>
@@ -9256,7 +9289,7 @@
           <p:cNvPr id="5" name="">
             <a:extLst xmlns:a="http://schemas.openxmlformats.org/drawingml/2006/main">
               <a:ext uri="{FF2B5EF4-FFF2-40B4-BE49-F238E27FC236}">
-                <a16:creationId xmlns:a16="http://schemas.microsoft.com/office/drawing/2014/main" id="{282F26F9-01EC-45D9-A667-D3DD1040474A}"/>
+                <a16:creationId xmlns:a16="http://schemas.microsoft.com/office/drawing/2014/main" id="{69C18632-676F-432C-8B5D-6274162259D1}"/>
               </a:ext>
             </a:extLst>
           </p:cNvPr>
@@ -9322,7 +9355,7 @@
           <p:cNvPr id="6" name="">
             <a:extLst xmlns:a="http://schemas.openxmlformats.org/drawingml/2006/main">
               <a:ext uri="{FF2B5EF4-FFF2-40B4-BE49-F238E27FC236}">
-                <a16:creationId xmlns:a16="http://schemas.microsoft.com/office/drawing/2014/main" id="{F77597FB-DF8F-40E6-8643-5B0AC77EE33D}"/>
+                <a16:creationId xmlns:a16="http://schemas.microsoft.com/office/drawing/2014/main" id="{B0DAA10D-C95C-45C5-801D-C03A96F79F88}"/>
               </a:ext>
             </a:extLst>
           </p:cNvPr>
@@ -9388,7 +9421,7 @@
           <p:cNvPr id="7" name="">
             <a:extLst xmlns:a="http://schemas.openxmlformats.org/drawingml/2006/main">
               <a:ext uri="{FF2B5EF4-FFF2-40B4-BE49-F238E27FC236}">
-                <a16:creationId xmlns:a16="http://schemas.microsoft.com/office/drawing/2014/main" id="{FFA0C2D6-7B6B-49FE-B16A-3C5B2E4C1659}"/>
+                <a16:creationId xmlns:a16="http://schemas.microsoft.com/office/drawing/2014/main" id="{33021986-0068-4687-A9A7-75F9670D07DB}"/>
               </a:ext>
             </a:extLst>
           </p:cNvPr>
@@ -9523,7 +9556,7 @@
           <p:cNvPr id="8" name="">
             <a:extLst xmlns:a="http://schemas.openxmlformats.org/drawingml/2006/main">
               <a:ext uri="{FF2B5EF4-FFF2-40B4-BE49-F238E27FC236}">
-                <a16:creationId xmlns:a16="http://schemas.microsoft.com/office/drawing/2014/main" id="{F9C17798-D6B6-4266-818C-F9C25AE67F83}"/>
+                <a16:creationId xmlns:a16="http://schemas.microsoft.com/office/drawing/2014/main" id="{40EEB9AB-4FEE-4DA6-9E0A-428107AB4617}"/>
               </a:ext>
             </a:extLst>
           </p:cNvPr>
@@ -9589,7 +9622,7 @@
           <p:cNvPr id="9" name="">
             <a:extLst xmlns:a="http://schemas.openxmlformats.org/drawingml/2006/main">
               <a:ext uri="{FF2B5EF4-FFF2-40B4-BE49-F238E27FC236}">
-                <a16:creationId xmlns:a16="http://schemas.microsoft.com/office/drawing/2014/main" id="{B7D4D2B8-C661-41DF-A892-3FFF0956CE3D}"/>
+                <a16:creationId xmlns:a16="http://schemas.microsoft.com/office/drawing/2014/main" id="{501122AC-881F-481B-B6FA-A27D46919FE4}"/>
               </a:ext>
             </a:extLst>
           </p:cNvPr>
@@ -9722,7 +9755,7 @@
     </p:spTree>
     <p:extLst>
       <p:ext uri="{BB962C8B-B14F-4D97-AF65-F5344CB8AC3E}">
-        <p14:creationId xmlns:p14="http://schemas.microsoft.com/office/powerpoint/2010/main" val="1687119908"/>
+        <p14:creationId xmlns:p14="http://schemas.microsoft.com/office/powerpoint/2010/main" val="833317381"/>
       </p:ext>
     </p:extLst>
   </p:cSld>
@@ -9753,7 +9786,7 @@
           <p:cNvPr id="11" name="">
             <a:extLst xmlns:a="http://schemas.openxmlformats.org/drawingml/2006/main">
               <a:ext uri="{FF2B5EF4-FFF2-40B4-BE49-F238E27FC236}">
-                <a16:creationId xmlns:a16="http://schemas.microsoft.com/office/drawing/2014/main" id="{1B1FEADE-C2FB-4C6E-B877-F7F5CB60443D}"/>
+                <a16:creationId xmlns:a16="http://schemas.microsoft.com/office/drawing/2014/main" id="{403763D3-CD6B-40B8-8C28-E32F2FE2D0B0}"/>
               </a:ext>
             </a:extLst>
           </p:cNvPr>
@@ -9819,7 +9852,7 @@
           <p:cNvPr id="2" name="">
             <a:extLst xmlns:a="http://schemas.openxmlformats.org/drawingml/2006/main">
               <a:ext uri="{FF2B5EF4-FFF2-40B4-BE49-F238E27FC236}">
-                <a16:creationId xmlns:a16="http://schemas.microsoft.com/office/drawing/2014/main" id="{6507BD41-471F-451B-A095-D81DB2387A79}"/>
+                <a16:creationId xmlns:a16="http://schemas.microsoft.com/office/drawing/2014/main" id="{CB86F674-FEB0-41DD-A736-D02FCE1A0558}"/>
               </a:ext>
             </a:extLst>
           </p:cNvPr>
@@ -9885,7 +9918,7 @@
           <p:cNvPr id="3" name="">
             <a:extLst xmlns:a="http://schemas.openxmlformats.org/drawingml/2006/main">
               <a:ext uri="{FF2B5EF4-FFF2-40B4-BE49-F238E27FC236}">
-                <a16:creationId xmlns:a16="http://schemas.microsoft.com/office/drawing/2014/main" id="{EFAD05B4-01FE-436F-BA06-12E3BBB8BF28}"/>
+                <a16:creationId xmlns:a16="http://schemas.microsoft.com/office/drawing/2014/main" id="{767A8D15-C878-4EEC-88C8-EF1C8D3C73DA}"/>
               </a:ext>
             </a:extLst>
           </p:cNvPr>
@@ -9951,7 +9984,7 @@
           <p:cNvPr id="4" name="">
             <a:extLst xmlns:a="http://schemas.openxmlformats.org/drawingml/2006/main">
               <a:ext uri="{FF2B5EF4-FFF2-40B4-BE49-F238E27FC236}">
-                <a16:creationId xmlns:a16="http://schemas.microsoft.com/office/drawing/2014/main" id="{9A0DB87A-31A5-4BCE-9EC0-8110D1CA1591}"/>
+                <a16:creationId xmlns:a16="http://schemas.microsoft.com/office/drawing/2014/main" id="{9B5C7CF5-8F56-47EE-80C8-BF2947532D97}"/>
               </a:ext>
             </a:extLst>
           </p:cNvPr>
@@ -10017,7 +10050,7 @@
           <p:cNvPr id="5" name="">
             <a:extLst xmlns:a="http://schemas.openxmlformats.org/drawingml/2006/main">
               <a:ext uri="{FF2B5EF4-FFF2-40B4-BE49-F238E27FC236}">
-                <a16:creationId xmlns:a16="http://schemas.microsoft.com/office/drawing/2014/main" id="{01A45E8A-0616-4D88-A8B4-72D667C2F641}"/>
+                <a16:creationId xmlns:a16="http://schemas.microsoft.com/office/drawing/2014/main" id="{55DE58E1-25CD-412D-8722-1B6D3FE89804}"/>
               </a:ext>
             </a:extLst>
           </p:cNvPr>
@@ -10083,7 +10116,7 @@
           <p:cNvPr id="6" name="">
             <a:extLst xmlns:a="http://schemas.openxmlformats.org/drawingml/2006/main">
               <a:ext uri="{FF2B5EF4-FFF2-40B4-BE49-F238E27FC236}">
-                <a16:creationId xmlns:a16="http://schemas.microsoft.com/office/drawing/2014/main" id="{24BFB11D-0758-4AB7-ADD5-8DD98751DA6C}"/>
+                <a16:creationId xmlns:a16="http://schemas.microsoft.com/office/drawing/2014/main" id="{0193C570-F0C5-4E09-9C53-894DCB8968BC}"/>
               </a:ext>
             </a:extLst>
           </p:cNvPr>
@@ -10149,7 +10182,7 @@
           <p:cNvPr id="7" name="">
             <a:extLst xmlns:a="http://schemas.openxmlformats.org/drawingml/2006/main">
               <a:ext uri="{FF2B5EF4-FFF2-40B4-BE49-F238E27FC236}">
-                <a16:creationId xmlns:a16="http://schemas.microsoft.com/office/drawing/2014/main" id="{CA8C5A6C-8090-4791-A0B6-97C0F446334D}"/>
+                <a16:creationId xmlns:a16="http://schemas.microsoft.com/office/drawing/2014/main" id="{EA91739A-899D-455F-AA6F-35E5886114E8}"/>
               </a:ext>
             </a:extLst>
           </p:cNvPr>
@@ -10204,7 +10237,7 @@
                 <a:latin typeface="Arial"/>
                 <a:ea typeface="Arial"/>
                 <a:cs typeface="Arial"/>
-                <a:hlinkClick xmlns:r="http://schemas.openxmlformats.org/officeDocument/2006/relationships" r:id="R99eeb2efcbe34f73"/>
+                <a:hlinkClick xmlns:r="http://schemas.openxmlformats.org/officeDocument/2006/relationships" r:id="R7ff7361f2c01464a"/>
               </a:rPr>
               <a:t>https://belovmaksimalekseevich.github.io/sberindex-municipal-atlas-2026/</a:t>
             </a:r>
@@ -10216,7 +10249,7 @@
           <p:cNvPr id="8" name="">
             <a:extLst xmlns:a="http://schemas.openxmlformats.org/drawingml/2006/main">
               <a:ext uri="{FF2B5EF4-FFF2-40B4-BE49-F238E27FC236}">
-                <a16:creationId xmlns:a16="http://schemas.microsoft.com/office/drawing/2014/main" id="{5D4C8F54-FC44-4A27-BA91-6BA011C98E15}"/>
+                <a16:creationId xmlns:a16="http://schemas.microsoft.com/office/drawing/2014/main" id="{D3954F6A-1A6A-4009-A06A-3664970901FC}"/>
               </a:ext>
             </a:extLst>
           </p:cNvPr>
@@ -10282,7 +10315,7 @@
           <p:cNvPr id="9" name="">
             <a:extLst xmlns:a="http://schemas.openxmlformats.org/drawingml/2006/main">
               <a:ext uri="{FF2B5EF4-FFF2-40B4-BE49-F238E27FC236}">
-                <a16:creationId xmlns:a16="http://schemas.microsoft.com/office/drawing/2014/main" id="{BEE49B47-B6D2-401F-A396-F9D107D8654C}"/>
+                <a16:creationId xmlns:a16="http://schemas.microsoft.com/office/drawing/2014/main" id="{EEC89C42-4EF4-4490-96A9-0BE26779BE2F}"/>
               </a:ext>
             </a:extLst>
           </p:cNvPr>
@@ -10337,7 +10370,7 @@
                 <a:latin typeface="Arial"/>
                 <a:ea typeface="Arial"/>
                 <a:cs typeface="Arial"/>
-                <a:hlinkClick xmlns:r="http://schemas.openxmlformats.org/officeDocument/2006/relationships" r:id="Rbadf50f270564df9"/>
+                <a:hlinkClick xmlns:r="http://schemas.openxmlformats.org/officeDocument/2006/relationships" r:id="Rd2ef0cbc603746a0"/>
               </a:rPr>
               <a:t>https://github.com/belovmaksimalekseevich/sberindex-municipal-atlas-2026</a:t>
             </a:r>
@@ -10349,7 +10382,7 @@
           <p:cNvPr id="10" name="">
             <a:extLst xmlns:a="http://schemas.openxmlformats.org/drawingml/2006/main">
               <a:ext uri="{FF2B5EF4-FFF2-40B4-BE49-F238E27FC236}">
-                <a16:creationId xmlns:a16="http://schemas.microsoft.com/office/drawing/2014/main" id="{41B811D4-79A8-486E-87CE-55E7BA13C241}"/>
+                <a16:creationId xmlns:a16="http://schemas.microsoft.com/office/drawing/2014/main" id="{8AC43B78-72AC-4B37-9D64-E0A9C2604829}"/>
               </a:ext>
             </a:extLst>
           </p:cNvPr>
@@ -10413,7 +10446,7 @@
     </p:spTree>
     <p:extLst>
       <p:ext uri="{BB962C8B-B14F-4D97-AF65-F5344CB8AC3E}">
-        <p14:creationId xmlns:p14="http://schemas.microsoft.com/office/powerpoint/2010/main" val="359524897"/>
+        <p14:creationId xmlns:p14="http://schemas.microsoft.com/office/powerpoint/2010/main" val="1421411490"/>
       </p:ext>
     </p:extLst>
   </p:cSld>
@@ -10444,7 +10477,7 @@
           <p:cNvPr id="8" name="">
             <a:extLst xmlns:a="http://schemas.openxmlformats.org/drawingml/2006/main">
               <a:ext uri="{FF2B5EF4-FFF2-40B4-BE49-F238E27FC236}">
-                <a16:creationId xmlns:a16="http://schemas.microsoft.com/office/drawing/2014/main" id="{516384FE-F832-43D5-B4D3-6A4A099D7B2D}"/>
+                <a16:creationId xmlns:a16="http://schemas.microsoft.com/office/drawing/2014/main" id="{05E1889D-93DE-476B-ADEC-E757416C213D}"/>
               </a:ext>
             </a:extLst>
           </p:cNvPr>
@@ -10510,7 +10543,7 @@
           <p:cNvPr id="2" name="">
             <a:extLst xmlns:a="http://schemas.openxmlformats.org/drawingml/2006/main">
               <a:ext uri="{FF2B5EF4-FFF2-40B4-BE49-F238E27FC236}">
-                <a16:creationId xmlns:a16="http://schemas.microsoft.com/office/drawing/2014/main" id="{75059B0D-E7E2-4B90-BC59-EE88D48D1B72}"/>
+                <a16:creationId xmlns:a16="http://schemas.microsoft.com/office/drawing/2014/main" id="{60C58307-2777-44C2-8C78-428242C3D19B}"/>
               </a:ext>
             </a:extLst>
           </p:cNvPr>
@@ -10576,7 +10609,7 @@
           <p:cNvPr id="3" name="">
             <a:extLst xmlns:a="http://schemas.openxmlformats.org/drawingml/2006/main">
               <a:ext uri="{FF2B5EF4-FFF2-40B4-BE49-F238E27FC236}">
-                <a16:creationId xmlns:a16="http://schemas.microsoft.com/office/drawing/2014/main" id="{29908E5A-907D-408E-8DC2-AFD61C3A97D3}"/>
+                <a16:creationId xmlns:a16="http://schemas.microsoft.com/office/drawing/2014/main" id="{938D8EF8-DA12-4A26-B0FD-12A523901D85}"/>
               </a:ext>
             </a:extLst>
           </p:cNvPr>
@@ -10642,7 +10675,7 @@
           <p:cNvPr id="4" name="">
             <a:extLst xmlns:a="http://schemas.openxmlformats.org/drawingml/2006/main">
               <a:ext uri="{FF2B5EF4-FFF2-40B4-BE49-F238E27FC236}">
-                <a16:creationId xmlns:a16="http://schemas.microsoft.com/office/drawing/2014/main" id="{2C8A5E1A-A985-4E8C-89C7-1374B08A6EEC}"/>
+                <a16:creationId xmlns:a16="http://schemas.microsoft.com/office/drawing/2014/main" id="{053C8A4C-2949-4ED5-8D36-ADCF6947CE6E}"/>
               </a:ext>
             </a:extLst>
           </p:cNvPr>
@@ -10708,7 +10741,7 @@
           <p:cNvPr id="5" name="">
             <a:extLst xmlns:a="http://schemas.openxmlformats.org/drawingml/2006/main">
               <a:ext uri="{FF2B5EF4-FFF2-40B4-BE49-F238E27FC236}">
-                <a16:creationId xmlns:a16="http://schemas.microsoft.com/office/drawing/2014/main" id="{8BE130CE-B45F-415F-B2CA-0F06D7967335}"/>
+                <a16:creationId xmlns:a16="http://schemas.microsoft.com/office/drawing/2014/main" id="{47DEE343-8B59-4348-B784-02FD7E58E092}"/>
               </a:ext>
             </a:extLst>
           </p:cNvPr>
@@ -10774,7 +10807,7 @@
           <p:cNvPr id="6" name="">
             <a:extLst xmlns:a="http://schemas.openxmlformats.org/drawingml/2006/main">
               <a:ext uri="{FF2B5EF4-FFF2-40B4-BE49-F238E27FC236}">
-                <a16:creationId xmlns:a16="http://schemas.microsoft.com/office/drawing/2014/main" id="{CA59B52A-BEF2-4F74-BA48-F20E16707449}"/>
+                <a16:creationId xmlns:a16="http://schemas.microsoft.com/office/drawing/2014/main" id="{B6A68250-17C0-46C1-B5E8-A102921A07E0}"/>
               </a:ext>
             </a:extLst>
           </p:cNvPr>
@@ -11173,7 +11206,7 @@
           <p:cNvPr id="7" name="">
             <a:extLst xmlns:a="http://schemas.openxmlformats.org/drawingml/2006/main">
               <a:ext uri="{FF2B5EF4-FFF2-40B4-BE49-F238E27FC236}">
-                <a16:creationId xmlns:a16="http://schemas.microsoft.com/office/drawing/2014/main" id="{2CDA296F-CF70-4D4E-9CCF-0477643FFFFC}"/>
+                <a16:creationId xmlns:a16="http://schemas.microsoft.com/office/drawing/2014/main" id="{08C33C91-F363-4524-9F23-DDDA6FD13480}"/>
               </a:ext>
             </a:extLst>
           </p:cNvPr>
@@ -11237,7 +11270,7 @@
     </p:spTree>
     <p:extLst>
       <p:ext uri="{BB962C8B-B14F-4D97-AF65-F5344CB8AC3E}">
-        <p14:creationId xmlns:p14="http://schemas.microsoft.com/office/powerpoint/2010/main" val="55137426"/>
+        <p14:creationId xmlns:p14="http://schemas.microsoft.com/office/powerpoint/2010/main" val="1197677178"/>
       </p:ext>
     </p:extLst>
   </p:cSld>
@@ -11268,7 +11301,7 @@
           <p:cNvPr id="8" name="">
             <a:extLst xmlns:a="http://schemas.openxmlformats.org/drawingml/2006/main">
               <a:ext uri="{FF2B5EF4-FFF2-40B4-BE49-F238E27FC236}">
-                <a16:creationId xmlns:a16="http://schemas.microsoft.com/office/drawing/2014/main" id="{0A81CF89-B1FC-487E-8D1C-9CC44FAD2893}"/>
+                <a16:creationId xmlns:a16="http://schemas.microsoft.com/office/drawing/2014/main" id="{45B121F4-71FD-4CDC-BA8D-65775A71E95C}"/>
               </a:ext>
             </a:extLst>
           </p:cNvPr>
@@ -11334,7 +11367,7 @@
           <p:cNvPr id="2" name="">
             <a:extLst xmlns:a="http://schemas.openxmlformats.org/drawingml/2006/main">
               <a:ext uri="{FF2B5EF4-FFF2-40B4-BE49-F238E27FC236}">
-                <a16:creationId xmlns:a16="http://schemas.microsoft.com/office/drawing/2014/main" id="{58AFE994-DE9F-4310-83A2-2EB13BFCC891}"/>
+                <a16:creationId xmlns:a16="http://schemas.microsoft.com/office/drawing/2014/main" id="{D50BB14F-2BD2-42D2-9771-5D0761D9BF91}"/>
               </a:ext>
             </a:extLst>
           </p:cNvPr>
@@ -11390,7 +11423,7 @@
                 <a:ea typeface="Arial"/>
                 <a:cs typeface="Arial"/>
               </a:rPr>
-              <a:t>Близость разделяет уровень и форму расходов</a:t>
+              <a:t>Близость учитывает уровень и состав расходов</a:t>
             </a:r>
           </a:p>
         </p:txBody>
@@ -11400,7 +11433,7 @@
           <p:cNvPr id="3" name="">
             <a:extLst xmlns:a="http://schemas.openxmlformats.org/drawingml/2006/main">
               <a:ext uri="{FF2B5EF4-FFF2-40B4-BE49-F238E27FC236}">
-                <a16:creationId xmlns:a16="http://schemas.microsoft.com/office/drawing/2014/main" id="{4CBC5885-75C3-4174-80CD-89F768541555}"/>
+                <a16:creationId xmlns:a16="http://schemas.microsoft.com/office/drawing/2014/main" id="{C685C71D-FB28-43FB-8F69-E2C8B2DA87C0}"/>
               </a:ext>
             </a:extLst>
           </p:cNvPr>
@@ -11456,7 +11489,7 @@
                 <a:ea typeface="Arial"/>
                 <a:cs typeface="Arial"/>
               </a:rPr>
-              <a:t>Рабочее пространство X6: L, h и четыре координаты HelmertCLR. Для S_Dbw — эквивалентное по расстояниям Y7.</a:t>
+              <a:t>L — логарифм Total; h — контраст геометрического среднего пяти категорий с Total; R — четыре координаты относительного состава (HelmertCLR).</a:t>
             </a:r>
           </a:p>
         </p:txBody>
@@ -11466,7 +11499,7 @@
           <p:cNvPr id="4" name="">
             <a:extLst xmlns:a="http://schemas.openxmlformats.org/drawingml/2006/main">
               <a:ext uri="{FF2B5EF4-FFF2-40B4-BE49-F238E27FC236}">
-                <a16:creationId xmlns:a16="http://schemas.microsoft.com/office/drawing/2014/main" id="{D7A2FB2B-8EFA-4DCC-8490-8272360F9463}"/>
+                <a16:creationId xmlns:a16="http://schemas.microsoft.com/office/drawing/2014/main" id="{1F1A0DB2-6508-48F8-893F-FBAEDEA43BC2}"/>
               </a:ext>
             </a:extLst>
           </p:cNvPr>
@@ -11532,7 +11565,7 @@
           <p:cNvPr id="5" name="">
             <a:extLst xmlns:a="http://schemas.openxmlformats.org/drawingml/2006/main">
               <a:ext uri="{FF2B5EF4-FFF2-40B4-BE49-F238E27FC236}">
-                <a16:creationId xmlns:a16="http://schemas.microsoft.com/office/drawing/2014/main" id="{36A7E8BC-8678-4E6F-A877-1A0BC111C733}"/>
+                <a16:creationId xmlns:a16="http://schemas.microsoft.com/office/drawing/2014/main" id="{D0C980BE-B043-4D73-91E3-08552B16CFA9}"/>
               </a:ext>
             </a:extLst>
           </p:cNvPr>
@@ -11598,7 +11631,7 @@
           <p:cNvPr id="6" name="">
             <a:extLst xmlns:a="http://schemas.openxmlformats.org/drawingml/2006/main">
               <a:ext uri="{FF2B5EF4-FFF2-40B4-BE49-F238E27FC236}">
-                <a16:creationId xmlns:a16="http://schemas.microsoft.com/office/drawing/2014/main" id="{F3CC330B-6C08-436B-ACB0-0FF1C58CF6B7}"/>
+                <a16:creationId xmlns:a16="http://schemas.microsoft.com/office/drawing/2014/main" id="{C1CC02EE-480D-4235-8C10-422788226C9C}"/>
               </a:ext>
             </a:extLst>
           </p:cNvPr>
@@ -11664,7 +11697,7 @@
           <p:cNvPr id="7" name="">
             <a:extLst xmlns:a="http://schemas.openxmlformats.org/drawingml/2006/main">
               <a:ext uri="{FF2B5EF4-FFF2-40B4-BE49-F238E27FC236}">
-                <a16:creationId xmlns:a16="http://schemas.microsoft.com/office/drawing/2014/main" id="{3E70AA55-BD2C-465E-AEA3-BE1ED31C35BE}"/>
+                <a16:creationId xmlns:a16="http://schemas.microsoft.com/office/drawing/2014/main" id="{92747666-9CBB-4A1C-B824-0AE3D0791D5F}"/>
               </a:ext>
             </a:extLst>
           </p:cNvPr>
@@ -11940,7 +11973,7 @@
     </p:spTree>
     <p:extLst>
       <p:ext uri="{BB962C8B-B14F-4D97-AF65-F5344CB8AC3E}">
-        <p14:creationId xmlns:p14="http://schemas.microsoft.com/office/powerpoint/2010/main" val="239038602"/>
+        <p14:creationId xmlns:p14="http://schemas.microsoft.com/office/powerpoint/2010/main" val="1020666862"/>
       </p:ext>
     </p:extLst>
   </p:cSld>
@@ -11971,7 +12004,7 @@
           <p:cNvPr id="8" name="">
             <a:extLst xmlns:a="http://schemas.openxmlformats.org/drawingml/2006/main">
               <a:ext uri="{FF2B5EF4-FFF2-40B4-BE49-F238E27FC236}">
-                <a16:creationId xmlns:a16="http://schemas.microsoft.com/office/drawing/2014/main" id="{5770D1EB-A1D1-4BBA-9461-7CD70E8B5704}"/>
+                <a16:creationId xmlns:a16="http://schemas.microsoft.com/office/drawing/2014/main" id="{D0AA4055-FB56-47F4-9ECD-65599EB8045F}"/>
               </a:ext>
             </a:extLst>
           </p:cNvPr>
@@ -12037,7 +12070,7 @@
           <p:cNvPr id="2" name="">
             <a:extLst xmlns:a="http://schemas.openxmlformats.org/drawingml/2006/main">
               <a:ext uri="{FF2B5EF4-FFF2-40B4-BE49-F238E27FC236}">
-                <a16:creationId xmlns:a16="http://schemas.microsoft.com/office/drawing/2014/main" id="{896267B6-B7A2-41CF-81B3-31B93FC160C7}"/>
+                <a16:creationId xmlns:a16="http://schemas.microsoft.com/office/drawing/2014/main" id="{836672D7-1A50-463B-A288-F6A24C8F8228}"/>
               </a:ext>
             </a:extLst>
           </p:cNvPr>
@@ -12103,7 +12136,7 @@
           <p:cNvPr id="3" name="">
             <a:extLst xmlns:a="http://schemas.openxmlformats.org/drawingml/2006/main">
               <a:ext uri="{FF2B5EF4-FFF2-40B4-BE49-F238E27FC236}">
-                <a16:creationId xmlns:a16="http://schemas.microsoft.com/office/drawing/2014/main" id="{EA7D17EA-5F2D-4136-9BF9-D98F13648259}"/>
+                <a16:creationId xmlns:a16="http://schemas.microsoft.com/office/drawing/2014/main" id="{BC638D07-57C0-4455-AC27-5ED6F9FF3FC0}"/>
               </a:ext>
             </a:extLst>
           </p:cNvPr>
@@ -12169,7 +12202,7 @@
           <p:cNvPr id="4" name="">
             <a:extLst xmlns:a="http://schemas.openxmlformats.org/drawingml/2006/main">
               <a:ext uri="{FF2B5EF4-FFF2-40B4-BE49-F238E27FC236}">
-                <a16:creationId xmlns:a16="http://schemas.microsoft.com/office/drawing/2014/main" id="{D31B9AE2-1C38-46EF-8CEF-78AF130442C1}"/>
+                <a16:creationId xmlns:a16="http://schemas.microsoft.com/office/drawing/2014/main" id="{F4C288CB-CFFF-4F57-B805-75082FA69943}"/>
               </a:ext>
             </a:extLst>
           </p:cNvPr>
@@ -12235,7 +12268,7 @@
           <p:cNvPr id="5" name="">
             <a:extLst xmlns:a="http://schemas.openxmlformats.org/drawingml/2006/main">
               <a:ext uri="{FF2B5EF4-FFF2-40B4-BE49-F238E27FC236}">
-                <a16:creationId xmlns:a16="http://schemas.microsoft.com/office/drawing/2014/main" id="{ACFB03E9-B41E-4E14-91A6-41EAC9D729AD}"/>
+                <a16:creationId xmlns:a16="http://schemas.microsoft.com/office/drawing/2014/main" id="{C92D6A02-F428-4FFA-BFEF-DD7105D68880}"/>
               </a:ext>
             </a:extLst>
           </p:cNvPr>
@@ -12301,7 +12334,7 @@
           <p:cNvPr id="6" name="">
             <a:extLst xmlns:a="http://schemas.openxmlformats.org/drawingml/2006/main">
               <a:ext uri="{FF2B5EF4-FFF2-40B4-BE49-F238E27FC236}">
-                <a16:creationId xmlns:a16="http://schemas.microsoft.com/office/drawing/2014/main" id="{ABE92A15-33D1-449F-AE61-5D0036870DA1}"/>
+                <a16:creationId xmlns:a16="http://schemas.microsoft.com/office/drawing/2014/main" id="{33A23A8A-08E8-4E31-8AFF-B4812C72A254}"/>
               </a:ext>
             </a:extLst>
           </p:cNvPr>
@@ -12626,7 +12659,7 @@
           <p:cNvPr id="7" name="">
             <a:extLst xmlns:a="http://schemas.openxmlformats.org/drawingml/2006/main">
               <a:ext uri="{FF2B5EF4-FFF2-40B4-BE49-F238E27FC236}">
-                <a16:creationId xmlns:a16="http://schemas.microsoft.com/office/drawing/2014/main" id="{B006E4E0-ACBE-482C-9E98-56BECA67E954}"/>
+                <a16:creationId xmlns:a16="http://schemas.microsoft.com/office/drawing/2014/main" id="{315B0260-2930-467C-88A0-759FA1F3CCF4}"/>
               </a:ext>
             </a:extLst>
           </p:cNvPr>
@@ -12690,7 +12723,7 @@
     </p:spTree>
     <p:extLst>
       <p:ext uri="{BB962C8B-B14F-4D97-AF65-F5344CB8AC3E}">
-        <p14:creationId xmlns:p14="http://schemas.microsoft.com/office/powerpoint/2010/main" val="1175510934"/>
+        <p14:creationId xmlns:p14="http://schemas.microsoft.com/office/powerpoint/2010/main" val="1047701643"/>
       </p:ext>
     </p:extLst>
   </p:cSld>
@@ -12721,7 +12754,7 @@
           <p:cNvPr id="8" name="">
             <a:extLst xmlns:a="http://schemas.openxmlformats.org/drawingml/2006/main">
               <a:ext uri="{FF2B5EF4-FFF2-40B4-BE49-F238E27FC236}">
-                <a16:creationId xmlns:a16="http://schemas.microsoft.com/office/drawing/2014/main" id="{5ECADBAA-B437-4306-9934-68D36C8AC8BE}"/>
+                <a16:creationId xmlns:a16="http://schemas.microsoft.com/office/drawing/2014/main" id="{0CA2F7C2-852A-4EB2-819C-326F4677438F}"/>
               </a:ext>
             </a:extLst>
           </p:cNvPr>
@@ -12787,7 +12820,7 @@
           <p:cNvPr id="2" name="">
             <a:extLst xmlns:a="http://schemas.openxmlformats.org/drawingml/2006/main">
               <a:ext uri="{FF2B5EF4-FFF2-40B4-BE49-F238E27FC236}">
-                <a16:creationId xmlns:a16="http://schemas.microsoft.com/office/drawing/2014/main" id="{B84626AC-288E-404B-96E6-EA2535486C79}"/>
+                <a16:creationId xmlns:a16="http://schemas.microsoft.com/office/drawing/2014/main" id="{585CE289-DF6D-427C-9202-557FAAEFBB3E}"/>
               </a:ext>
             </a:extLst>
           </p:cNvPr>
@@ -12853,7 +12886,7 @@
           <p:cNvPr id="3" name="">
             <a:extLst xmlns:a="http://schemas.openxmlformats.org/drawingml/2006/main">
               <a:ext uri="{FF2B5EF4-FFF2-40B4-BE49-F238E27FC236}">
-                <a16:creationId xmlns:a16="http://schemas.microsoft.com/office/drawing/2014/main" id="{117EC240-9E94-40AA-A9F7-8244689071FC}"/>
+                <a16:creationId xmlns:a16="http://schemas.microsoft.com/office/drawing/2014/main" id="{858B993E-ED35-4174-B975-813FFD304862}"/>
               </a:ext>
             </a:extLst>
           </p:cNvPr>
@@ -12909,7 +12942,7 @@
                 <a:ea typeface="Arial"/>
                 <a:cs typeface="Arial"/>
               </a:rPr>
-              <a:t>Декабрь 2024: общая наблюдаемая опора 2 103 территории и согласованный оцениватель.</a:t>
+              <a:t>Декабрь 2024: оценка для одних и тех же 2 103 территорий по единым правилам расчёта индексов.</a:t>
             </a:r>
           </a:p>
         </p:txBody>
@@ -12919,7 +12952,7 @@
           <p:cNvPr id="4" name="">
             <a:extLst xmlns:a="http://schemas.openxmlformats.org/drawingml/2006/main">
               <a:ext uri="{FF2B5EF4-FFF2-40B4-BE49-F238E27FC236}">
-                <a16:creationId xmlns:a16="http://schemas.microsoft.com/office/drawing/2014/main" id="{F070ED4E-45A1-47B8-9C94-D84DE37D348B}"/>
+                <a16:creationId xmlns:a16="http://schemas.microsoft.com/office/drawing/2014/main" id="{4DAC77BC-C5D1-421A-96B8-BBE8AD2D9E25}"/>
               </a:ext>
             </a:extLst>
           </p:cNvPr>
@@ -12985,7 +13018,7 @@
           <p:cNvPr id="5" name="">
             <a:extLst xmlns:a="http://schemas.openxmlformats.org/drawingml/2006/main">
               <a:ext uri="{FF2B5EF4-FFF2-40B4-BE49-F238E27FC236}">
-                <a16:creationId xmlns:a16="http://schemas.microsoft.com/office/drawing/2014/main" id="{89BF98B1-79D7-429D-8AD2-F3A440BB9030}"/>
+                <a16:creationId xmlns:a16="http://schemas.microsoft.com/office/drawing/2014/main" id="{52E9D033-E1EE-4835-9163-2F71DB7D260A}"/>
               </a:ext>
             </a:extLst>
           </p:cNvPr>
@@ -13051,7 +13084,7 @@
           <p:cNvPr id="6" name="">
             <a:extLst xmlns:a="http://schemas.openxmlformats.org/drawingml/2006/main">
               <a:ext uri="{FF2B5EF4-FFF2-40B4-BE49-F238E27FC236}">
-                <a16:creationId xmlns:a16="http://schemas.microsoft.com/office/drawing/2014/main" id="{A8AACA8E-8DEA-4DFD-9EAA-CB4C55200531}"/>
+                <a16:creationId xmlns:a16="http://schemas.microsoft.com/office/drawing/2014/main" id="{9EFA1283-7B9C-420D-A83F-ECA5A0D1ABA0}"/>
               </a:ext>
             </a:extLst>
           </p:cNvPr>
@@ -13936,7 +13969,7 @@
           <p:cNvPr id="7" name="">
             <a:extLst xmlns:a="http://schemas.openxmlformats.org/drawingml/2006/main">
               <a:ext uri="{FF2B5EF4-FFF2-40B4-BE49-F238E27FC236}">
-                <a16:creationId xmlns:a16="http://schemas.microsoft.com/office/drawing/2014/main" id="{2305B9D4-F716-4B68-8BDA-D91BAA1B6E89}"/>
+                <a16:creationId xmlns:a16="http://schemas.microsoft.com/office/drawing/2014/main" id="{74FB22F7-974F-47BA-B21A-C133E144364A}"/>
               </a:ext>
             </a:extLst>
           </p:cNvPr>
@@ -14000,7 +14033,7 @@
     </p:spTree>
     <p:extLst>
       <p:ext uri="{BB962C8B-B14F-4D97-AF65-F5344CB8AC3E}">
-        <p14:creationId xmlns:p14="http://schemas.microsoft.com/office/powerpoint/2010/main" val="1377943603"/>
+        <p14:creationId xmlns:p14="http://schemas.microsoft.com/office/powerpoint/2010/main" val="283661092"/>
       </p:ext>
     </p:extLst>
   </p:cSld>
@@ -14031,7 +14064,7 @@
           <p:cNvPr id="8" name="">
             <a:extLst xmlns:a="http://schemas.openxmlformats.org/drawingml/2006/main">
               <a:ext uri="{FF2B5EF4-FFF2-40B4-BE49-F238E27FC236}">
-                <a16:creationId xmlns:a16="http://schemas.microsoft.com/office/drawing/2014/main" id="{C0FB5803-964E-40D4-9DD3-FCD5278700DB}"/>
+                <a16:creationId xmlns:a16="http://schemas.microsoft.com/office/drawing/2014/main" id="{D93E4FD7-4066-4611-B1D1-91E7FD238F6D}"/>
               </a:ext>
             </a:extLst>
           </p:cNvPr>
@@ -14097,7 +14130,7 @@
           <p:cNvPr id="2" name="">
             <a:extLst xmlns:a="http://schemas.openxmlformats.org/drawingml/2006/main">
               <a:ext uri="{FF2B5EF4-FFF2-40B4-BE49-F238E27FC236}">
-                <a16:creationId xmlns:a16="http://schemas.microsoft.com/office/drawing/2014/main" id="{FD1DCE05-6E68-44EE-8407-8921BBA17A17}"/>
+                <a16:creationId xmlns:a16="http://schemas.microsoft.com/office/drawing/2014/main" id="{70B01451-6FE0-4DAA-8B0A-F5AF892D9A98}"/>
               </a:ext>
             </a:extLst>
           </p:cNvPr>
@@ -14163,7 +14196,7 @@
           <p:cNvPr id="3" name="">
             <a:extLst xmlns:a="http://schemas.openxmlformats.org/drawingml/2006/main">
               <a:ext uri="{FF2B5EF4-FFF2-40B4-BE49-F238E27FC236}">
-                <a16:creationId xmlns:a16="http://schemas.microsoft.com/office/drawing/2014/main" id="{1DD3C516-9C26-49BB-B109-CAFB411DCD42}"/>
+                <a16:creationId xmlns:a16="http://schemas.microsoft.com/office/drawing/2014/main" id="{0DC7F37E-7C95-4488-83AC-75A9A1DFAF53}"/>
               </a:ext>
             </a:extLst>
           </p:cNvPr>
@@ -14219,7 +14252,7 @@
                 <a:ea typeface="Arial"/>
                 <a:cs typeface="Arial"/>
               </a:rPr>
-              <a:t>Средний ARI: сравнение с полной опорой своего метода и K. По 10 одинаковых 80%-ных подвыборок в каждом месяце.</a:t>
+              <a:t>ARI = 1 означает одинаковое разбиение. Средний ARI к полной опоре своего метода и K; 10 подвыборок по 80% в месяц, общих для методов.</a:t>
             </a:r>
           </a:p>
         </p:txBody>
@@ -14229,7 +14262,7 @@
           <p:cNvPr id="4" name="">
             <a:extLst xmlns:a="http://schemas.openxmlformats.org/drawingml/2006/main">
               <a:ext uri="{FF2B5EF4-FFF2-40B4-BE49-F238E27FC236}">
-                <a16:creationId xmlns:a16="http://schemas.microsoft.com/office/drawing/2014/main" id="{94EAA497-AC90-4028-AB25-31C32BA0FAB2}"/>
+                <a16:creationId xmlns:a16="http://schemas.microsoft.com/office/drawing/2014/main" id="{3E8314AB-0E8B-45BF-88CF-86F27DE33F8C}"/>
               </a:ext>
             </a:extLst>
           </p:cNvPr>
@@ -14295,7 +14328,7 @@
           <p:cNvPr id="5" name="">
             <a:extLst xmlns:a="http://schemas.openxmlformats.org/drawingml/2006/main">
               <a:ext uri="{FF2B5EF4-FFF2-40B4-BE49-F238E27FC236}">
-                <a16:creationId xmlns:a16="http://schemas.microsoft.com/office/drawing/2014/main" id="{85C55716-68D1-4748-8E7E-A142B63343CB}"/>
+                <a16:creationId xmlns:a16="http://schemas.microsoft.com/office/drawing/2014/main" id="{832A9FB1-5C6F-46DA-BA94-8E3BEFDCDCE6}"/>
               </a:ext>
             </a:extLst>
           </p:cNvPr>
@@ -14361,7 +14394,7 @@
           <p:cNvPr id="6" name="Chart">
             <a:extLst xmlns:a="http://schemas.openxmlformats.org/drawingml/2006/main">
               <a:ext uri="{FF2B5EF4-FFF2-40B4-BE49-F238E27FC236}">
-                <a16:creationId xmlns:a16="http://schemas.microsoft.com/office/drawing/2014/main" id="{0596370E-9CA1-4600-9C83-CA57F16DA8ED}"/>
+                <a16:creationId xmlns:a16="http://schemas.microsoft.com/office/drawing/2014/main" id="{EBC92926-DE97-4343-8812-C419D13C9B5E}"/>
               </a:ext>
             </a:extLst>
           </p:cNvPr>
@@ -14374,7 +14407,7 @@
         </p:xfrm>
         <a:graphic xmlns:a="http://schemas.openxmlformats.org/drawingml/2006/main">
           <a:graphicData uri="http://schemas.openxmlformats.org/drawingml/2006/chart">
-            <c:chart xmlns:r="http://schemas.openxmlformats.org/officeDocument/2006/relationships" xmlns:c="http://schemas.openxmlformats.org/drawingml/2006/chart" r:id="R13e7fd1c26c24de1"/>
+            <c:chart xmlns:r="http://schemas.openxmlformats.org/officeDocument/2006/relationships" xmlns:c="http://schemas.openxmlformats.org/drawingml/2006/chart" r:id="Raef0f7759c0d40c4"/>
           </a:graphicData>
         </a:graphic>
       </p:graphicFrame>
@@ -14383,7 +14416,7 @@
           <p:cNvPr id="7" name="">
             <a:extLst xmlns:a="http://schemas.openxmlformats.org/drawingml/2006/main">
               <a:ext uri="{FF2B5EF4-FFF2-40B4-BE49-F238E27FC236}">
-                <a16:creationId xmlns:a16="http://schemas.microsoft.com/office/drawing/2014/main" id="{908B7464-9C92-4795-8F73-D38A10FE15E7}"/>
+                <a16:creationId xmlns:a16="http://schemas.microsoft.com/office/drawing/2014/main" id="{57FFD9F8-8D9D-4B0B-B220-9B3761C5C1ED}"/>
               </a:ext>
             </a:extLst>
           </p:cNvPr>
@@ -14447,7 +14480,7 @@
     </p:spTree>
     <p:extLst>
       <p:ext uri="{BB962C8B-B14F-4D97-AF65-F5344CB8AC3E}">
-        <p14:creationId xmlns:p14="http://schemas.microsoft.com/office/powerpoint/2010/main" val="371568643"/>
+        <p14:creationId xmlns:p14="http://schemas.microsoft.com/office/powerpoint/2010/main" val="1336699585"/>
       </p:ext>
     </p:extLst>
   </p:cSld>
@@ -14478,7 +14511,7 @@
           <p:cNvPr id="7" name="">
             <a:extLst xmlns:a="http://schemas.openxmlformats.org/drawingml/2006/main">
               <a:ext uri="{FF2B5EF4-FFF2-40B4-BE49-F238E27FC236}">
-                <a16:creationId xmlns:a16="http://schemas.microsoft.com/office/drawing/2014/main" id="{48C2041D-B2A3-4BE6-8A0F-900683FAADF9}"/>
+                <a16:creationId xmlns:a16="http://schemas.microsoft.com/office/drawing/2014/main" id="{0EF9D290-1EE5-410E-8CA4-27D59862D774}"/>
               </a:ext>
             </a:extLst>
           </p:cNvPr>
@@ -14544,7 +14577,7 @@
           <p:cNvPr id="2" name="">
             <a:extLst xmlns:a="http://schemas.openxmlformats.org/drawingml/2006/main">
               <a:ext uri="{FF2B5EF4-FFF2-40B4-BE49-F238E27FC236}">
-                <a16:creationId xmlns:a16="http://schemas.microsoft.com/office/drawing/2014/main" id="{9E3FED5A-A14C-4EA8-B5EE-8A18B4DD1A72}"/>
+                <a16:creationId xmlns:a16="http://schemas.microsoft.com/office/drawing/2014/main" id="{462F4B24-462E-443F-ACA7-1FE9E35B8739}"/>
               </a:ext>
             </a:extLst>
           </p:cNvPr>
@@ -14610,7 +14643,7 @@
           <p:cNvPr id="3" name="">
             <a:extLst xmlns:a="http://schemas.openxmlformats.org/drawingml/2006/main">
               <a:ext uri="{FF2B5EF4-FFF2-40B4-BE49-F238E27FC236}">
-                <a16:creationId xmlns:a16="http://schemas.microsoft.com/office/drawing/2014/main" id="{C5F14C15-0CBE-48FB-BFE5-921CC3103EE5}"/>
+                <a16:creationId xmlns:a16="http://schemas.microsoft.com/office/drawing/2014/main" id="{B9933DDD-A0F6-4F62-AB58-98BFFE47A14D}"/>
               </a:ext>
             </a:extLst>
           </p:cNvPr>
@@ -14666,7 +14699,7 @@
                 <a:ea typeface="Arial"/>
                 <a:cs typeface="Arial"/>
               </a:rPr>
-              <a:t>SSE6, декабрь 2024. G0–G5 — исходные метки. Средний уровень означает близость к медианам выборки.</a:t>
+              <a:t>SSE6, декабрь 2024. G0–G5 — исходные метки. Профили — медианы по МО, без весов населения; средний уровень означает близость к медианам выборки.</a:t>
             </a:r>
           </a:p>
         </p:txBody>
@@ -14676,7 +14709,7 @@
           <p:cNvPr id="4" name="">
             <a:extLst xmlns:a="http://schemas.openxmlformats.org/drawingml/2006/main">
               <a:ext uri="{FF2B5EF4-FFF2-40B4-BE49-F238E27FC236}">
-                <a16:creationId xmlns:a16="http://schemas.microsoft.com/office/drawing/2014/main" id="{BE412429-0104-42CC-8DE3-001D760CE3A6}"/>
+                <a16:creationId xmlns:a16="http://schemas.microsoft.com/office/drawing/2014/main" id="{DF26197A-7E2A-48B9-BEC1-6093457411A9}"/>
               </a:ext>
             </a:extLst>
           </p:cNvPr>
@@ -14742,7 +14775,7 @@
           <p:cNvPr id="5" name="">
             <a:extLst xmlns:a="http://schemas.openxmlformats.org/drawingml/2006/main">
               <a:ext uri="{FF2B5EF4-FFF2-40B4-BE49-F238E27FC236}">
-                <a16:creationId xmlns:a16="http://schemas.microsoft.com/office/drawing/2014/main" id="{43A0F476-F65B-482C-B32E-11305454E9BB}"/>
+                <a16:creationId xmlns:a16="http://schemas.microsoft.com/office/drawing/2014/main" id="{CC251908-5216-4A57-955D-DDB09C2BB663}"/>
               </a:ext>
             </a:extLst>
           </p:cNvPr>
@@ -14808,7 +14841,7 @@
           <p:cNvPr id="6" name="">
             <a:extLst xmlns:a="http://schemas.openxmlformats.org/drawingml/2006/main">
               <a:ext uri="{FF2B5EF4-FFF2-40B4-BE49-F238E27FC236}">
-                <a16:creationId xmlns:a16="http://schemas.microsoft.com/office/drawing/2014/main" id="{0B4CC98F-0008-4B6F-B435-7B50AB7F7E67}"/>
+                <a16:creationId xmlns:a16="http://schemas.microsoft.com/office/drawing/2014/main" id="{BF8F0427-D560-4820-892D-75489F43E113}"/>
               </a:ext>
             </a:extLst>
           </p:cNvPr>
@@ -14824,8 +14857,8 @@
             <a:tbl>
               <a:tblPr/>
               <a:tblGrid>
-                <a:gridCol w="7905750"/>
-                <a:gridCol w="1047750"/>
+                <a:gridCol w="7524750"/>
+                <a:gridCol w="1428750"/>
                 <a:gridCol w="2247900"/>
               </a:tblGrid>
               <a:tr h="530679">
@@ -14867,7 +14900,7 @@
                           <a:ea typeface="Arial"/>
                           <a:cs typeface="Arial"/>
                         </a:rPr>
-                        <a:t>ID</a:t>
+                        <a:t>Число МО</a:t>
                       </a:r>
                     </a:p>
                   </a:txBody>
@@ -15353,7 +15386,7 @@
     </p:spTree>
     <p:extLst>
       <p:ext uri="{BB962C8B-B14F-4D97-AF65-F5344CB8AC3E}">
-        <p14:creationId xmlns:p14="http://schemas.microsoft.com/office/powerpoint/2010/main" val="1870514006"/>
+        <p14:creationId xmlns:p14="http://schemas.microsoft.com/office/powerpoint/2010/main" val="649548275"/>
       </p:ext>
     </p:extLst>
   </p:cSld>
@@ -15384,7 +15417,7 @@
           <p:cNvPr id="8" name="">
             <a:extLst xmlns:a="http://schemas.openxmlformats.org/drawingml/2006/main">
               <a:ext uri="{FF2B5EF4-FFF2-40B4-BE49-F238E27FC236}">
-                <a16:creationId xmlns:a16="http://schemas.microsoft.com/office/drawing/2014/main" id="{D852B6E2-A95E-4756-8C6B-A8F4A7306177}"/>
+                <a16:creationId xmlns:a16="http://schemas.microsoft.com/office/drawing/2014/main" id="{DD370B61-8ED5-4FDE-B3B2-419F5928BB89}"/>
               </a:ext>
             </a:extLst>
           </p:cNvPr>
@@ -15450,7 +15483,7 @@
           <p:cNvPr id="2" name="">
             <a:extLst xmlns:a="http://schemas.openxmlformats.org/drawingml/2006/main">
               <a:ext uri="{FF2B5EF4-FFF2-40B4-BE49-F238E27FC236}">
-                <a16:creationId xmlns:a16="http://schemas.microsoft.com/office/drawing/2014/main" id="{FFC2AE64-7451-4BEE-9B06-009804C3BE24}"/>
+                <a16:creationId xmlns:a16="http://schemas.microsoft.com/office/drawing/2014/main" id="{6DF7E59C-A381-4C8D-94FE-FE7D29A1E540}"/>
               </a:ext>
             </a:extLst>
           </p:cNvPr>
@@ -15516,7 +15549,7 @@
           <p:cNvPr id="3" name="">
             <a:extLst xmlns:a="http://schemas.openxmlformats.org/drawingml/2006/main">
               <a:ext uri="{FF2B5EF4-FFF2-40B4-BE49-F238E27FC236}">
-                <a16:creationId xmlns:a16="http://schemas.microsoft.com/office/drawing/2014/main" id="{0F9DA305-D8F6-4382-812C-C51E7CAC20A7}"/>
+                <a16:creationId xmlns:a16="http://schemas.microsoft.com/office/drawing/2014/main" id="{0579F954-8A80-40D2-AE05-B9074AF89A01}"/>
               </a:ext>
             </a:extLst>
           </p:cNvPr>
@@ -15572,7 +15605,7 @@
                 <a:ea typeface="Arial"/>
                 <a:cs typeface="Arial"/>
               </a:rPr>
-              <a:t>NCut10, декабрь 2024. Содержательные названия описывают наблюдаемые медианы и доступный годовой контекст.</a:t>
+              <a:t>NCut10, декабрь 2024. Названия описывают медианы по МО без весов населения и доступный годовой контекст.</a:t>
             </a:r>
           </a:p>
         </p:txBody>
@@ -15582,7 +15615,7 @@
           <p:cNvPr id="4" name="">
             <a:extLst xmlns:a="http://schemas.openxmlformats.org/drawingml/2006/main">
               <a:ext uri="{FF2B5EF4-FFF2-40B4-BE49-F238E27FC236}">
-                <a16:creationId xmlns:a16="http://schemas.microsoft.com/office/drawing/2014/main" id="{BBFCE859-EE46-4385-BA28-1929D56F7DCF}"/>
+                <a16:creationId xmlns:a16="http://schemas.microsoft.com/office/drawing/2014/main" id="{5DF8FD49-B748-46DF-AC1E-D28B62AD9230}"/>
               </a:ext>
             </a:extLst>
           </p:cNvPr>
@@ -15648,7 +15681,7 @@
           <p:cNvPr id="5" name="">
             <a:extLst xmlns:a="http://schemas.openxmlformats.org/drawingml/2006/main">
               <a:ext uri="{FF2B5EF4-FFF2-40B4-BE49-F238E27FC236}">
-                <a16:creationId xmlns:a16="http://schemas.microsoft.com/office/drawing/2014/main" id="{00CEAC60-0DC4-46DE-928D-64EEDA44C8B6}"/>
+                <a16:creationId xmlns:a16="http://schemas.microsoft.com/office/drawing/2014/main" id="{9F76AEA3-1DB1-4F0A-BE5D-1B1B9AC0B1D2}"/>
               </a:ext>
             </a:extLst>
           </p:cNvPr>
@@ -15714,7 +15747,7 @@
           <p:cNvPr id="6" name="">
             <a:extLst xmlns:a="http://schemas.openxmlformats.org/drawingml/2006/main">
               <a:ext uri="{FF2B5EF4-FFF2-40B4-BE49-F238E27FC236}">
-                <a16:creationId xmlns:a16="http://schemas.microsoft.com/office/drawing/2014/main" id="{E2E3069A-825E-4561-AF93-9EB0217B189F}"/>
+                <a16:creationId xmlns:a16="http://schemas.microsoft.com/office/drawing/2014/main" id="{E8C8E031-122B-4C6F-A8DB-6A306A15C7B4}"/>
               </a:ext>
             </a:extLst>
           </p:cNvPr>
@@ -15730,9 +15763,9 @@
             <a:tbl>
               <a:tblPr/>
               <a:tblGrid>
-                <a:gridCol w="8343900"/>
-                <a:gridCol w="952500"/>
-                <a:gridCol w="1905000"/>
+                <a:gridCol w="7772400"/>
+                <a:gridCol w="1333500"/>
+                <a:gridCol w="2095500"/>
               </a:tblGrid>
               <a:tr h="533400">
                 <a:tc>
@@ -15773,7 +15806,7 @@
                           <a:ea typeface="Arial"/>
                           <a:cs typeface="Arial"/>
                         </a:rPr>
-                        <a:t>ID</a:t>
+                        <a:t>Число МО</a:t>
                       </a:r>
                     </a:p>
                   </a:txBody>
@@ -15797,7 +15830,7 @@
                           <a:ea typeface="Arial"/>
                           <a:cs typeface="Arial"/>
                         </a:rPr>
-                        <a:t>С контекстом</a:t>
+                        <a:t>МО с контекстом</a:t>
                       </a:r>
                     </a:p>
                   </a:txBody>
@@ -16045,7 +16078,7 @@
                           <a:ea typeface="Arial"/>
                           <a:cs typeface="Arial"/>
                         </a:rPr>
-                        <a:t>G3. Повышенные расходы при умеренной зарплате организаций</a:t>
+                        <a:t>G3. Повышенные расходы при умеренной зарплате работников организаций</a:t>
                       </a:r>
                     </a:p>
                   </a:txBody>
@@ -16187,7 +16220,7 @@
           <p:cNvPr id="7" name="">
             <a:extLst xmlns:a="http://schemas.openxmlformats.org/drawingml/2006/main">
               <a:ext uri="{FF2B5EF4-FFF2-40B4-BE49-F238E27FC236}">
-                <a16:creationId xmlns:a16="http://schemas.microsoft.com/office/drawing/2014/main" id="{6E75C6F0-2713-40D0-A79B-207930A99C08}"/>
+                <a16:creationId xmlns:a16="http://schemas.microsoft.com/office/drawing/2014/main" id="{2B8C4EE4-B113-42B9-9270-DBB9EE5EC05D}"/>
               </a:ext>
             </a:extLst>
           </p:cNvPr>
@@ -16198,8 +16231,8 @@
         </p:nvSpPr>
         <p:spPr>
           <a:xfrm xmlns:a="http://schemas.openxmlformats.org/drawingml/2006/main">
-            <a:off x="495300" y="5838825"/>
-            <a:ext cx="11049000" cy="476250"/>
+            <a:off x="495300" y="5981700"/>
+            <a:ext cx="11049000" cy="333375"/>
           </a:xfrm>
           <a:prstGeom xmlns:a="http://schemas.openxmlformats.org/drawingml/2006/main" prst="rect">
             <a:avLst/>
@@ -16243,7 +16276,7 @@
                 <a:ea typeface="Arial"/>
                 <a:cs typeface="Arial"/>
               </a:rPr>
-              <a:t>Зарплата относится к работникам организаций; это не доход всех жителей. Контекст доступен только для части каждой группы.</a:t>
+              <a:t>Зарплата работников организаций — не доход всех жителей. Контекст доступен для части каждой группы.</a:t>
             </a:r>
           </a:p>
         </p:txBody>
@@ -16251,7 +16284,7 @@
     </p:spTree>
     <p:extLst>
       <p:ext uri="{BB962C8B-B14F-4D97-AF65-F5344CB8AC3E}">
-        <p14:creationId xmlns:p14="http://schemas.microsoft.com/office/powerpoint/2010/main" val="1064655499"/>
+        <p14:creationId xmlns:p14="http://schemas.microsoft.com/office/powerpoint/2010/main" val="1487325538"/>
       </p:ext>
     </p:extLst>
   </p:cSld>
@@ -16282,7 +16315,7 @@
           <p:cNvPr id="8" name="">
             <a:extLst xmlns:a="http://schemas.openxmlformats.org/drawingml/2006/main">
               <a:ext uri="{FF2B5EF4-FFF2-40B4-BE49-F238E27FC236}">
-                <a16:creationId xmlns:a16="http://schemas.microsoft.com/office/drawing/2014/main" id="{21592417-64F0-467F-B591-FC56D1DDA984}"/>
+                <a16:creationId xmlns:a16="http://schemas.microsoft.com/office/drawing/2014/main" id="{58016527-CBB2-4059-B5A3-5DCF5EAE8DCA}"/>
               </a:ext>
             </a:extLst>
           </p:cNvPr>
@@ -16348,7 +16381,7 @@
           <p:cNvPr id="2" name="">
             <a:extLst xmlns:a="http://schemas.openxmlformats.org/drawingml/2006/main">
               <a:ext uri="{FF2B5EF4-FFF2-40B4-BE49-F238E27FC236}">
-                <a16:creationId xmlns:a16="http://schemas.microsoft.com/office/drawing/2014/main" id="{6D8CEDC7-5EC0-4A1B-B4CE-7540BCC0630A}"/>
+                <a16:creationId xmlns:a16="http://schemas.microsoft.com/office/drawing/2014/main" id="{BCFDC1F7-0C5D-47A9-9968-E223316E6023}"/>
               </a:ext>
             </a:extLst>
           </p:cNvPr>
@@ -16414,7 +16447,7 @@
           <p:cNvPr id="3" name="">
             <a:extLst xmlns:a="http://schemas.openxmlformats.org/drawingml/2006/main">
               <a:ext uri="{FF2B5EF4-FFF2-40B4-BE49-F238E27FC236}">
-                <a16:creationId xmlns:a16="http://schemas.microsoft.com/office/drawing/2014/main" id="{30CFF899-2EF0-4A06-942D-2C4F3F8592F8}"/>
+                <a16:creationId xmlns:a16="http://schemas.microsoft.com/office/drawing/2014/main" id="{AAA51EA9-D6C5-4D6E-8E9E-8ECB8E871907}"/>
               </a:ext>
             </a:extLst>
           </p:cNvPr>
@@ -16470,7 +16503,7 @@
                 <a:ea typeface="Arial"/>
                 <a:cs typeface="Arial"/>
               </a:rPr>
-              <a:t>NCut10, декабрь 2024. Содержательные названия описывают наблюдаемые медианы и доступный годовой контекст.</a:t>
+              <a:t>NCut10, декабрь 2024. Названия описывают медианы по МО без весов населения и доступный годовой контекст.</a:t>
             </a:r>
           </a:p>
         </p:txBody>
@@ -16480,7 +16513,7 @@
           <p:cNvPr id="4" name="">
             <a:extLst xmlns:a="http://schemas.openxmlformats.org/drawingml/2006/main">
               <a:ext uri="{FF2B5EF4-FFF2-40B4-BE49-F238E27FC236}">
-                <a16:creationId xmlns:a16="http://schemas.microsoft.com/office/drawing/2014/main" id="{8CCE34F8-4A1B-42AF-BFBB-B3B2972E5702}"/>
+                <a16:creationId xmlns:a16="http://schemas.microsoft.com/office/drawing/2014/main" id="{89149544-38DC-4A7B-BE3B-7E4BCBB3D288}"/>
               </a:ext>
             </a:extLst>
           </p:cNvPr>
@@ -16546,7 +16579,7 @@
           <p:cNvPr id="5" name="">
             <a:extLst xmlns:a="http://schemas.openxmlformats.org/drawingml/2006/main">
               <a:ext uri="{FF2B5EF4-FFF2-40B4-BE49-F238E27FC236}">
-                <a16:creationId xmlns:a16="http://schemas.microsoft.com/office/drawing/2014/main" id="{36B59CEF-1397-4087-BE45-F9062E79650F}"/>
+                <a16:creationId xmlns:a16="http://schemas.microsoft.com/office/drawing/2014/main" id="{13CCF5ED-D581-4A88-A9EE-E00984EA5205}"/>
               </a:ext>
             </a:extLst>
           </p:cNvPr>
@@ -16612,7 +16645,7 @@
           <p:cNvPr id="6" name="">
             <a:extLst xmlns:a="http://schemas.openxmlformats.org/drawingml/2006/main">
               <a:ext uri="{FF2B5EF4-FFF2-40B4-BE49-F238E27FC236}">
-                <a16:creationId xmlns:a16="http://schemas.microsoft.com/office/drawing/2014/main" id="{7EC8AE03-B9EE-4622-B5E4-AF9C74D2FF4E}"/>
+                <a16:creationId xmlns:a16="http://schemas.microsoft.com/office/drawing/2014/main" id="{E07EC65D-E0F0-4957-BAB5-CAAACDB10633}"/>
               </a:ext>
             </a:extLst>
           </p:cNvPr>
@@ -16628,9 +16661,9 @@
             <a:tbl>
               <a:tblPr/>
               <a:tblGrid>
-                <a:gridCol w="8343900"/>
-                <a:gridCol w="952500"/>
-                <a:gridCol w="1905000"/>
+                <a:gridCol w="7772400"/>
+                <a:gridCol w="1333500"/>
+                <a:gridCol w="2095500"/>
               </a:tblGrid>
               <a:tr h="533400">
                 <a:tc>
@@ -16671,7 +16704,7 @@
                           <a:ea typeface="Arial"/>
                           <a:cs typeface="Arial"/>
                         </a:rPr>
-                        <a:t>ID</a:t>
+                        <a:t>Число МО</a:t>
                       </a:r>
                     </a:p>
                   </a:txBody>
@@ -16695,7 +16728,7 @@
                           <a:ea typeface="Arial"/>
                           <a:cs typeface="Arial"/>
                         </a:rPr>
-                        <a:t>С контекстом</a:t>
+                        <a:t>МО с контекстом</a:t>
                       </a:r>
                     </a:p>
                   </a:txBody>
@@ -16869,7 +16902,7 @@
                           <a:ea typeface="Arial"/>
                           <a:cs typeface="Arial"/>
                         </a:rPr>
-                        <a:t>G7. Высокие расходы и зарплата организаций при низкой доступности рынков</a:t>
+                        <a:t>G7. Высокие расходы и зарплата работников организаций при низкой доступности рынков</a:t>
                       </a:r>
                     </a:p>
                   </a:txBody>
@@ -17085,7 +17118,7 @@
           <p:cNvPr id="7" name="">
             <a:extLst xmlns:a="http://schemas.openxmlformats.org/drawingml/2006/main">
               <a:ext uri="{FF2B5EF4-FFF2-40B4-BE49-F238E27FC236}">
-                <a16:creationId xmlns:a16="http://schemas.microsoft.com/office/drawing/2014/main" id="{698C8FEA-7789-4F37-94C1-027555E6A831}"/>
+                <a16:creationId xmlns:a16="http://schemas.microsoft.com/office/drawing/2014/main" id="{D9543122-9603-4D88-815D-FCE787308AE4}"/>
               </a:ext>
             </a:extLst>
           </p:cNvPr>
@@ -17096,8 +17129,8 @@
         </p:nvSpPr>
         <p:spPr>
           <a:xfrm xmlns:a="http://schemas.openxmlformats.org/drawingml/2006/main">
-            <a:off x="495300" y="5838825"/>
-            <a:ext cx="11049000" cy="476250"/>
+            <a:off x="495300" y="5981700"/>
+            <a:ext cx="11049000" cy="333375"/>
           </a:xfrm>
           <a:prstGeom xmlns:a="http://schemas.openxmlformats.org/drawingml/2006/main" prst="rect">
             <a:avLst/>
@@ -17149,7 +17182,7 @@
     </p:spTree>
     <p:extLst>
       <p:ext uri="{BB962C8B-B14F-4D97-AF65-F5344CB8AC3E}">
-        <p14:creationId xmlns:p14="http://schemas.microsoft.com/office/powerpoint/2010/main" val="830648002"/>
+        <p14:creationId xmlns:p14="http://schemas.microsoft.com/office/powerpoint/2010/main" val="1525636169"/>
       </p:ext>
     </p:extLst>
   </p:cSld>
